--- a/lessons/btli101_xrw5fg/btli1_l9_slides.pptx
+++ b/lessons/btli101_xrw5fg/btli1_l9_slides.pptx
@@ -4,6 +4,9 @@
   <p:sldMasterIdLst>
     <p:sldMasterId id="2147483648" r:id="rId1"/>
   </p:sldMasterIdLst>
+  <p:notesMasterIdLst>
+    <p:notesMasterId r:id="rId30"/>
+  </p:notesMasterIdLst>
   <p:sldIdLst>
     <p:sldId id="256" r:id="rId2"/>
     <p:sldId id="257" r:id="rId3"/>
@@ -34,9 +37,6 @@
     <p:sldId id="282" r:id="rId28"/>
     <p:sldId id="283" r:id="rId29"/>
   </p:sldIdLst>
-  <p:notesMasterIdLst>
-    <p:notesMasterId r:id="rId30"/>
-  </p:notesMasterIdLst>
   <p:sldSz cx="12192000" cy="6858000"/>
   <p:notesSz cx="6858000" cy="12192000"/>
   <p:defaultTextStyle>
@@ -131,6 +131,11 @@
       </a:defRPr>
     </a:lvl9pPr>
   </p:defaultTextStyle>
+  <p:extLst>
+    <p:ext uri="{EFAFB233-063F-42B5-8137-9DF3F51BA10A}">
+      <p15:sldGuideLst xmlns:p15="http://schemas.microsoft.com/office/powerpoint/2012/main"/>
+    </p:ext>
+  </p:extLst>
 </p:presentation>
 </file>
 
@@ -156,234 +161,10 @@
           <a:chExt cx="0" cy="0"/>
         </a:xfrm>
       </p:grpSpPr>
-      <p:sp>
-        <p:nvSpPr>
-          <p:cNvPr id="2" name="Header Placeholder 1"/>
-          <p:cNvSpPr>
-            <a:spLocks noGrp="1"/>
-          </p:cNvSpPr>
-          <p:nvPr>
-            <p:ph type="hdr" sz="quarter"/>
-          </p:nvPr>
-        </p:nvSpPr>
-        <p:spPr>
-          <a:xfrm>
-            <a:off x="0" y="0"/>
-            <a:ext cx="2971800" cy="458788"/>
-          </a:xfrm>
-          <a:prstGeom prst="rect">
-            <a:avLst/>
-          </a:prstGeom>
-        </p:spPr>
-        <p:txBody>
-          <a:bodyPr vert="horz" lIns="91440" tIns="45720" rIns="91440" bIns="45720" rtlCol="0"/>
-          <a:lstStyle>
-            <a:lvl1pPr algn="l">
-              <a:defRPr sz="1200"/>
-            </a:lvl1pPr>
-          </a:lstStyle>
-          <a:p>
-            <a:endParaRPr lang="en-US"/>
-          </a:p>
-        </p:txBody>
-      </p:sp>
-      <p:sp>
-        <p:nvSpPr>
-          <p:cNvPr id="3" name="Date Placeholder 2"/>
-          <p:cNvSpPr>
-            <a:spLocks noGrp="1"/>
-          </p:cNvSpPr>
-          <p:nvPr>
-            <p:ph type="dt" idx="1"/>
-          </p:nvPr>
-        </p:nvSpPr>
-        <p:spPr>
-          <a:xfrm>
-            <a:off x="3884613" y="0"/>
-            <a:ext cx="2971800" cy="458788"/>
-          </a:xfrm>
-          <a:prstGeom prst="rect">
-            <a:avLst/>
-          </a:prstGeom>
-        </p:spPr>
-        <p:txBody>
-          <a:bodyPr vert="horz" lIns="91440" tIns="45720" rIns="91440" bIns="45720" rtlCol="0"/>
-          <a:lstStyle>
-            <a:lvl1pPr algn="r">
-              <a:defRPr sz="1200"/>
-            </a:lvl1pPr>
-          </a:lstStyle>
-          <a:p>
-            <a:fld id="{5282F153-3F37-0F45-9E97-73ACFA13230C}" type="datetimeFigureOut">
-              <a:rPr lang="en-US"/>
-              <a:t>7/23/19</a:t>
-            </a:fld>
-            <a:endParaRPr lang="en-US"/>
-          </a:p>
-        </p:txBody>
-      </p:sp>
-      <p:sp>
-        <p:nvSpPr>
-          <p:cNvPr id="4" name="Slide Image Placeholder 3"/>
-          <p:cNvSpPr>
-            <a:spLocks noGrp="1" noRot="1" noChangeAspect="1"/>
-          </p:cNvSpPr>
-          <p:nvPr>
-            <p:ph type="sldImg" idx="2"/>
-          </p:nvPr>
-        </p:nvSpPr>
-        <p:spPr>
-          <a:xfrm>
-            <a:off x="685800" y="1143000"/>
-            <a:ext cx="5486400" cy="3086100"/>
-          </a:xfrm>
-          <a:prstGeom prst="rect">
-            <a:avLst/>
-          </a:prstGeom>
-          <a:noFill/>
-          <a:ln w="12700">
-            <a:solidFill>
-              <a:prstClr val="black"/>
-            </a:solidFill>
-          </a:ln>
-        </p:spPr>
-        <p:txBody>
-          <a:bodyPr vert="horz" lIns="91440" tIns="45720" rIns="91440" bIns="45720" rtlCol="0" anchor="ctr"/>
-          <a:lstStyle/>
-          <a:p>
-            <a:endParaRPr lang="en-US"/>
-          </a:p>
-        </p:txBody>
-      </p:sp>
-      <p:sp>
-        <p:nvSpPr>
-          <p:cNvPr id="5" name="Notes Placeholder 4"/>
-          <p:cNvSpPr>
-            <a:spLocks noGrp="1"/>
-          </p:cNvSpPr>
-          <p:nvPr>
-            <p:ph type="body" sz="quarter" idx="3"/>
-          </p:nvPr>
-        </p:nvSpPr>
-        <p:spPr>
-          <a:xfrm>
-            <a:off x="685800" y="4400550"/>
-            <a:ext cx="5486400" cy="3600450"/>
-          </a:xfrm>
-          <a:prstGeom prst="rect">
-            <a:avLst/>
-          </a:prstGeom>
-        </p:spPr>
-        <p:txBody>
-          <a:bodyPr vert="horz" lIns="91440" tIns="45720" rIns="91440" bIns="45720" rtlCol="0"/>
-          <a:lstStyle/>
-          <a:p>
-            <a:pPr lvl="0"/>
-            <a:r>
-              <a:rPr lang="en-US"/>
-              <a:t>Click to edit Master text styles</a:t>
-            </a:r>
-          </a:p>
-          <a:p>
-            <a:pPr lvl="1"/>
-            <a:r>
-              <a:rPr lang="en-US"/>
-              <a:t>Second level</a:t>
-            </a:r>
-          </a:p>
-          <a:p>
-            <a:pPr lvl="2"/>
-            <a:r>
-              <a:rPr lang="en-US"/>
-              <a:t>Third level</a:t>
-            </a:r>
-          </a:p>
-          <a:p>
-            <a:pPr lvl="3"/>
-            <a:r>
-              <a:rPr lang="en-US"/>
-              <a:t>Fourth level</a:t>
-            </a:r>
-          </a:p>
-          <a:p>
-            <a:pPr lvl="4"/>
-            <a:r>
-              <a:rPr lang="en-US"/>
-              <a:t>Fifth level</a:t>
-            </a:r>
-          </a:p>
-        </p:txBody>
-      </p:sp>
-      <p:sp>
-        <p:nvSpPr>
-          <p:cNvPr id="6" name="Footer Placeholder 5"/>
-          <p:cNvSpPr>
-            <a:spLocks noGrp="1"/>
-          </p:cNvSpPr>
-          <p:nvPr>
-            <p:ph type="ftr" sz="quarter" idx="4"/>
-          </p:nvPr>
-        </p:nvSpPr>
-        <p:spPr>
-          <a:xfrm>
-            <a:off x="0" y="8685213"/>
-            <a:ext cx="2971800" cy="458787"/>
-          </a:xfrm>
-          <a:prstGeom prst="rect">
-            <a:avLst/>
-          </a:prstGeom>
-        </p:spPr>
-        <p:txBody>
-          <a:bodyPr vert="horz" lIns="91440" tIns="45720" rIns="91440" bIns="45720" rtlCol="0" anchor="b"/>
-          <a:lstStyle>
-            <a:lvl1pPr algn="l">
-              <a:defRPr sz="1200"/>
-            </a:lvl1pPr>
-          </a:lstStyle>
-          <a:p>
-            <a:endParaRPr lang="en-US"/>
-          </a:p>
-        </p:txBody>
-      </p:sp>
-      <p:sp>
-        <p:nvSpPr>
-          <p:cNvPr id="7" name="Slide Number Placeholder 6"/>
-          <p:cNvSpPr>
-            <a:spLocks noGrp="1"/>
-          </p:cNvSpPr>
-          <p:nvPr>
-            <p:ph type="sldNum" sz="quarter" idx="5"/>
-          </p:nvPr>
-        </p:nvSpPr>
-        <p:spPr>
-          <a:xfrm>
-            <a:off x="3884613" y="8685213"/>
-            <a:ext cx="2971800" cy="458787"/>
-          </a:xfrm>
-          <a:prstGeom prst="rect">
-            <a:avLst/>
-          </a:prstGeom>
-        </p:spPr>
-        <p:txBody>
-          <a:bodyPr vert="horz" lIns="91440" tIns="45720" rIns="91440" bIns="45720" rtlCol="0" anchor="b"/>
-          <a:lstStyle>
-            <a:lvl1pPr algn="r">
-              <a:defRPr sz="1200"/>
-            </a:lvl1pPr>
-          </a:lstStyle>
-          <a:p>
-            <a:fld id="{CE5E9CC1-C706-0F49-92D6-E571CC5EEA8F}" type="slidenum">
-              <a:rPr lang="en-US"/>
-              <a:t>‹#›</a:t>
-            </a:fld>
-            <a:endParaRPr lang="en-US"/>
-          </a:p>
-        </p:txBody>
-      </p:sp>
     </p:spTree>
     <p:extLst>
       <p:ext uri="{BB962C8B-B14F-4D97-AF65-F5344CB8AC3E}">
-        <p14:creationId xmlns:p14="http://schemas.microsoft.com/office/powerpoint/2010/main" val="1024086991"/>
+        <p14:creationId xmlns:p14="http://schemas.microsoft.com/office/powerpoint/2010/main" val="1609786215"/>
       </p:ext>
     </p:extLst>
   </p:cSld>
@@ -541,8 +322,19 @@
           <a:p>
             <a:r>
               <a:rPr lang="en-US" dirty="0"/>
-              <a:t>Titingnan natin kung bakit hindi mo puwedeng paghiwalayin ang dalawa.</a:t>
-            </a:r>
+              <a:t>Titingnan natin kung bakit hindi mo puwedeng paghiwalayin ang </a:t>
+            </a:r>
+            <a:r>
+              <a:rPr lang="en-US" dirty="0" err="1"/>
+              <a:t>dalawa</a:t>
+            </a:r>
+            <a:r>
+              <a:rPr lang="en-US" dirty="0"/>
+              <a:t>.</a:t>
+            </a:r>
+          </a:p>
+          <a:p>
+            <a:endParaRPr lang="en-US" dirty="0"/>
           </a:p>
           <a:p>
             <a:r>
@@ -563,6 +355,9 @@
             </a:r>
           </a:p>
           <a:p>
+            <a:endParaRPr lang="en-US" dirty="0"/>
+          </a:p>
+          <a:p>
             <a:r>
               <a:rPr lang="en-US" dirty="0"/>
               <a:t>Ang tanong ng lesson: Ano ang bahagi ko sa ispiritwal na pag-usbong at pag-usad ng ibang tao?</a:t>
@@ -573,7 +368,6 @@
               <a:rPr lang="en-US" dirty="0"/>
               <a:t>Opening prayer bago mag-verse.</a:t>
             </a:r>
-            <a:endParaRPr lang="en-US" dirty="0"/>
           </a:p>
         </p:txBody>
       </p:sp>
@@ -709,7 +503,6 @@
               <a:rPr lang="en-US" dirty="0"/>
               <a:t>Inaasahang mabubuhay ang isang sugo sa kaparaanang hindi masisira ang kaniyang imahe, para hindi maapektuhan ang kaniyang mensahe.</a:t>
             </a:r>
-            <a:endParaRPr lang="en-US" dirty="0"/>
           </a:p>
         </p:txBody>
       </p:sp>
@@ -827,7 +620,6 @@
               <a:rPr lang="en-US" dirty="0"/>
               <a:t>Isang minuto lang — ang malalim na pag-uusap ay sa TALAKAY.</a:t>
             </a:r>
-            <a:endParaRPr lang="en-US" dirty="0"/>
           </a:p>
         </p:txBody>
       </p:sp>
@@ -963,7 +755,6 @@
               <a:rPr lang="en-US" dirty="0"/>
               <a:t>Isa sa pinakamadalas na nakakaligtaan ng isang Christian ang evangelism — huwag sanang ganun.</a:t>
             </a:r>
-            <a:endParaRPr lang="en-US" dirty="0"/>
           </a:p>
         </p:txBody>
       </p:sp>
@@ -1081,7 +872,6 @@
               <a:rPr lang="en-US" dirty="0"/>
               <a:t>Ipangako: bago matapos ang aralin, may isang simpleng kasangkapan na tayo — isang verse lang.</a:t>
             </a:r>
-            <a:endParaRPr lang="en-US" dirty="0"/>
           </a:p>
         </p:txBody>
       </p:sp>
@@ -1221,9 +1011,12 @@
           <a:p>
             <a:r>
               <a:rPr lang="en-US" dirty="0"/>
-              <a:t>Kagaya ng isang mapagkalingang ina, inaasahang magpapakita ang discipler ng dalisay, matuwid, at walang kapintasang pakikitungo (verse 10) — hindi sinless perfection, kundi maingat na pamumuhay para hindi matisod ang taong ipinagkatiwala sa kaniya (Romans 14:13).</a:t>
-            </a:r>
-            <a:endParaRPr lang="en-US" dirty="0"/>
+              <a:t>Kagaya ng isang mapagkalingang ina, inaasahang magpapakita ang discipler ng dalisay, matuwid, at walang kapintasang pakikitungo (verse 10) — hindi sinless perfection, kundi maingat na pamumuhay para hindi matisod ang taong ipinagkatiwala sa kaniya </a:t>
+            </a:r>
+            <a:r>
+              <a:rPr lang="en-US" b="1" dirty="0"/>
+              <a:t>(Romans 14:13).</a:t>
+            </a:r>
           </a:p>
         </p:txBody>
       </p:sp>
@@ -1341,7 +1134,6 @@
               <a:rPr lang="en-US" dirty="0"/>
               <a:t>Isang minuto lang.</a:t>
             </a:r>
-            <a:endParaRPr lang="en-US" dirty="0"/>
           </a:p>
         </p:txBody>
       </p:sp>
@@ -1483,7 +1275,6 @@
               <a:rPr lang="en-US" dirty="0"/>
               <a:t>PAGHAMON: hindi masyadong binebeybi ng isang matinong magulang ang kaniyang anak, lalo na kung may katandaan na ito; nararapat lang na ipakita nang malinaw ang katotohanan at hamunin ang disciple na tumugon nang positibo.</a:t>
             </a:r>
-            <a:endParaRPr lang="en-US" dirty="0"/>
           </a:p>
         </p:txBody>
       </p:sp>
@@ -1604,8 +1395,12 @@
           </a:p>
           <a:p>
             <a:r>
-              <a:rPr lang="en-US" dirty="0"/>
-              <a:t>Basahin ang 2 Timothy 2:2: At ang mga bagay na narinig mo sa akin sa gitna ng maraming saksi, ay siya mo ring ipagkatiwala sa mga taong tapat, na makapagtuturo naman sa iba.</a:t>
+              <a:rPr lang="en-US" b="1" dirty="0"/>
+              <a:t>Basahin ang 2 Timothy 2:2: </a:t>
+            </a:r>
+            <a:r>
+              <a:rPr lang="en-US" dirty="0"/>
+              <a:t>At ang mga bagay na narinig mo sa akin sa gitna ng maraming saksi, ay siya mo ring ipagkatiwala sa mga taong tapat, na makapagtuturo naman sa iba.</a:t>
             </a:r>
           </a:p>
           <a:p>
@@ -1628,10 +1423,13 @@
           </a:p>
           <a:p>
             <a:r>
-              <a:rPr lang="en-US" dirty="0"/>
-              <a:t>KRITIKAL: huwag putulin sa isa lang — evangelism lang o discipleship lang.</a:t>
-            </a:r>
-            <a:endParaRPr lang="en-US" dirty="0"/>
+              <a:rPr lang="en-US" b="1" dirty="0"/>
+              <a:t>KRITIKAL: </a:t>
+            </a:r>
+            <a:r>
+              <a:rPr lang="en-US" dirty="0"/>
+              <a:t>huwag putulin sa isa lang — evangelism lang o discipleship lang.</a:t>
+            </a:r>
           </a:p>
         </p:txBody>
       </p:sp>
@@ -1743,7 +1541,6 @@
               <a:rPr lang="en-US" dirty="0"/>
               <a:t>Ang vulnerability ng lead ang nagbubukas ng pinto para sa iba.</a:t>
             </a:r>
-            <a:endParaRPr lang="en-US" dirty="0"/>
           </a:p>
         </p:txBody>
       </p:sp>
@@ -1841,7 +1638,15 @@
           <a:p>
             <a:r>
               <a:rPr lang="en-US" dirty="0"/>
-              <a:t>Ito ang interact question ng USAD mismo.</a:t>
+              <a:t>Ito ang </a:t>
+            </a:r>
+            <a:r>
+              <a:rPr lang="en-US" b="1" dirty="0"/>
+              <a:t>interact question </a:t>
+            </a:r>
+            <a:r>
+              <a:rPr lang="en-US" dirty="0"/>
+              <a:t>ng USAD mismo.</a:t>
             </a:r>
           </a:p>
           <a:p>
@@ -1867,7 +1672,6 @@
               <a:rPr lang="en-US" dirty="0"/>
               <a:t>Interns: itala kung sino sa table ang walang naalalang discipler — pastoral follow-up iyon.</a:t>
             </a:r>
-            <a:endParaRPr lang="en-US" dirty="0"/>
           </a:p>
         </p:txBody>
       </p:sp>
@@ -1985,7 +1789,6 @@
               <a:rPr lang="en-US" dirty="0"/>
               <a:t>Huwag munang i-explain nang mahaba; babalikan natin ito.</a:t>
             </a:r>
-            <a:endParaRPr lang="en-US" dirty="0"/>
           </a:p>
         </p:txBody>
       </p:sp>
@@ -2109,7 +1912,6 @@
               <a:rPr lang="en-US" dirty="0"/>
               <a:t>Isara ang TALAKAY sa isang pangungusap na panalangin ng isang miyembro ng bawat table.</a:t>
             </a:r>
-            <a:endParaRPr lang="en-US" dirty="0"/>
           </a:p>
         </p:txBody>
       </p:sp>
@@ -2221,7 +2023,6 @@
               <a:rPr lang="en-US" dirty="0"/>
               <a:t>Ihanda ang participants sa dalawang kahon ng guide.</a:t>
             </a:r>
-            <a:endParaRPr lang="en-US" dirty="0"/>
           </a:p>
         </p:txBody>
       </p:sp>
@@ -2357,7 +2158,6 @@
               <a:rPr lang="en-US" dirty="0"/>
               <a:t>Tip: ang mga pangalang ito ay puwedeng maging EOLO names din sa MMT.</a:t>
             </a:r>
-            <a:endParaRPr lang="en-US" dirty="0"/>
           </a:p>
         </p:txBody>
       </p:sp>
@@ -2508,10 +2308,13 @@
           </a:p>
           <a:p>
             <a:r>
-              <a:rPr lang="en-US" dirty="0"/>
-              <a:t>KRITIKAL: kung may magtanong ng Three Circles, sabihin: Sa Lesson 20 natin tatalakayin nang buo — isang verse muna.</a:t>
-            </a:r>
-            <a:endParaRPr lang="en-US" dirty="0"/>
+              <a:rPr lang="en-US" b="1" dirty="0"/>
+              <a:t>KRITIKAL: </a:t>
+            </a:r>
+            <a:r>
+              <a:rPr lang="en-US" dirty="0"/>
+              <a:t>kung may magtanong ng Three Circles, sabihin: Sa Lesson 20 natin tatalakayin nang buo — isang verse muna.</a:t>
+            </a:r>
           </a:p>
         </p:txBody>
       </p:sp>
@@ -2623,7 +2426,6 @@
               <a:rPr lang="en-US" dirty="0"/>
               <a:t>Ito ang unang hakbang palayo sa malamig na paa.</a:t>
             </a:r>
-            <a:endParaRPr lang="en-US" dirty="0"/>
           </a:p>
         </p:txBody>
       </p:sp>
@@ -2747,7 +2549,6 @@
               <a:rPr lang="en-US" dirty="0"/>
               <a:t>Sabihin nang malinaw: ang mga ito ang unang babalikan ng L10.</a:t>
             </a:r>
-            <a:endParaRPr lang="en-US" dirty="0"/>
           </a:p>
         </p:txBody>
       </p:sp>
@@ -2931,7 +2732,6 @@
               <a:rPr lang="en-US" dirty="0"/>
               <a:t>Kung may umiyak o tumahimik nang matagal, lapitan nang pribado pagkatapos ng session.</a:t>
             </a:r>
-            <a:endParaRPr lang="en-US" dirty="0"/>
           </a:p>
         </p:txBody>
       </p:sp>
@@ -3043,7 +2843,6 @@
               <a:rPr lang="en-US" dirty="0"/>
               <a:t>Ito ang pangakong babalikan ng L10.</a:t>
             </a:r>
-            <a:endParaRPr lang="en-US" dirty="0"/>
           </a:p>
         </p:txBody>
       </p:sp>
@@ -3161,7 +2960,6 @@
               <a:rPr lang="en-US" dirty="0"/>
               <a:t>Tapos ang 60 minuto — landing sa 01:00.</a:t>
             </a:r>
-            <a:endParaRPr lang="en-US" dirty="0"/>
           </a:p>
         </p:txBody>
       </p:sp>
@@ -3275,28 +3073,54 @@
             </a:r>
           </a:p>
           <a:p>
-            <a:r>
-              <a:rPr lang="en-US" dirty="0"/>
-              <a:t>Basahin nang malakas ang Pangako Ko ng L8: Hindi ako owner — manager ako.</a:t>
-            </a:r>
-          </a:p>
-          <a:p>
-            <a:r>
-              <a:rPr lang="en-US" dirty="0"/>
+            <a:endParaRPr lang="en-US" dirty="0"/>
+          </a:p>
+          <a:p>
+            <a:r>
+              <a:rPr lang="en-US" dirty="0"/>
+              <a:t>Basahin nang malakas ang Pangako Ko ng L8: </a:t>
+            </a:r>
+            <a:r>
+              <a:rPr lang="en-US" i="1" dirty="0"/>
+              <a:t>Hindi ako owner — manager </a:t>
+            </a:r>
+            <a:r>
+              <a:rPr lang="en-US" i="1" dirty="0" err="1"/>
+              <a:t>ako</a:t>
+            </a:r>
+            <a:r>
+              <a:rPr lang="en-US" i="1" dirty="0"/>
+              <a:t>.</a:t>
+            </a:r>
+          </a:p>
+          <a:p>
+            <a:r>
+              <a:rPr lang="en-US" i="1" dirty="0"/>
               <a:t>Hindi ko waldasin ang biyayang ipinagkatiwala sa akin.</a:t>
             </a:r>
           </a:p>
           <a:p>
             <a:r>
-              <a:rPr lang="en-US" dirty="0"/>
+              <a:rPr lang="en-US" i="1" dirty="0"/>
               <a:t>Magiging channel ako ng biyaya, hindi vessel na nag-iipon lang.</a:t>
             </a:r>
           </a:p>
           <a:p>
             <a:r>
-              <a:rPr lang="en-US" dirty="0"/>
-              <a:t>Tapat na katiwala — sa oras, sa talento, sa pera.</a:t>
-            </a:r>
+              <a:rPr lang="en-US" i="1" dirty="0"/>
+              <a:t>Tapat na katiwala — sa oras, sa talento, sa </a:t>
+            </a:r>
+            <a:r>
+              <a:rPr lang="en-US" i="1" dirty="0" err="1"/>
+              <a:t>pera</a:t>
+            </a:r>
+            <a:r>
+              <a:rPr lang="en-US" i="1" dirty="0"/>
+              <a:t>.</a:t>
+            </a:r>
+          </a:p>
+          <a:p>
+            <a:endParaRPr lang="en-US" dirty="0"/>
           </a:p>
           <a:p>
             <a:r>
@@ -3309,7 +3133,6 @@
               <a:rPr lang="en-US" dirty="0"/>
               <a:t>Tulay: noong L8, ipinagkatiwala sa atin ang oras, talento, at pera; ngayong gabi, ang pinakamahalagang ipinagkatiwala sa atin — ang Mabuting Balita.</a:t>
             </a:r>
-            <a:endParaRPr lang="en-US" dirty="0"/>
           </a:p>
         </p:txBody>
       </p:sp>
@@ -3423,9 +3246,16 @@
             </a:r>
           </a:p>
           <a:p>
-            <a:r>
-              <a:rPr lang="en-US" dirty="0"/>
-              <a:t>Kapag may nagsabing nahirapan siyang magbigay, i-celebrate ang katapatan ng pag-amin.</a:t>
+            <a:endParaRPr lang="en-US" dirty="0"/>
+          </a:p>
+          <a:p>
+            <a:r>
+              <a:rPr lang="en-US" dirty="0" err="1"/>
+              <a:t>Kapag</a:t>
+            </a:r>
+            <a:r>
+              <a:rPr lang="en-US" dirty="0"/>
+              <a:t> may nagsabing nahirapan siyang magbigay, i-celebrate ang katapatan ng pag-amin.</a:t>
             </a:r>
           </a:p>
           <a:p>
@@ -3439,7 +3269,6 @@
               <a:rPr lang="en-US" dirty="0"/>
               <a:t>Itala ng interns kung sino ang walang dala — para sa gentle catch-up, hindi pagsabihan.</a:t>
             </a:r>
-            <a:endParaRPr lang="en-US" dirty="0"/>
           </a:p>
         </p:txBody>
       </p:sp>
@@ -3659,7 +3488,6 @@
               <a:rPr lang="en-US" dirty="0"/>
               <a:t>Sabihin lang: Hawakan ninyo muna ang galit na 'yan.</a:t>
             </a:r>
-            <a:endParaRPr lang="en-US" dirty="0"/>
           </a:p>
         </p:txBody>
       </p:sp>
@@ -3783,7 +3611,6 @@
               <a:rPr lang="en-US" dirty="0"/>
               <a:t>Sabihin lang: Hawakan ninyo muna ang galit na 'yan — babalikan natin ito sa dulo ng aralin.</a:t>
             </a:r>
-            <a:endParaRPr lang="en-US" dirty="0"/>
           </a:p>
         </p:txBody>
       </p:sp>
@@ -3921,11 +3748,13 @@
             </a:r>
           </a:p>
           <a:p>
+            <a:endParaRPr lang="en-US" dirty="0"/>
+          </a:p>
+          <a:p>
             <a:r>
               <a:rPr lang="en-US" dirty="0"/>
               <a:t>Sabihin sa participants: may mga patlang sa guide ninyo — punan habang nakikinig.</a:t>
             </a:r>
-            <a:endParaRPr lang="en-US" dirty="0"/>
           </a:p>
         </p:txBody>
       </p:sp>
@@ -4021,6 +3850,9 @@
             </a:r>
           </a:p>
           <a:p>
+            <a:endParaRPr lang="en-US" dirty="0"/>
+          </a:p>
+          <a:p>
             <a:r>
               <a:rPr lang="en-US" dirty="0"/>
               <a:t>Ipabilog sa participant guide ang mga utos na ibinilin ni Jesus sa Matthew 28:19-20: humayo, gawing alagad, bautismuhan, turuan.</a:t>
@@ -4055,7 +3887,6 @@
               <a:rPr lang="en-US" dirty="0"/>
               <a:t>Tingnan natin isa-isa — PAGHAYO muna.</a:t>
             </a:r>
-            <a:endParaRPr lang="en-US" dirty="0"/>
           </a:p>
         </p:txBody>
       </p:sp>
@@ -4179,7 +4010,6 @@
               <a:rPr lang="en-US" dirty="0"/>
               <a:t>Itanong nang mabilis: sino rito ang nasa Saved-Seated-Satisfied mode ngayon? Huwag nang sumagot — isipin lang.</a:t>
             </a:r>
-            <a:endParaRPr lang="en-US" dirty="0"/>
           </a:p>
         </p:txBody>
       </p:sp>
@@ -4252,6 +4082,11 @@
 <file path=ppt/slideMasters/slideMaster1.xml><?xml version="1.0" encoding="utf-8"?>
 <p:sldMaster xmlns:a="http://schemas.openxmlformats.org/drawingml/2006/main" xmlns:r="http://schemas.openxmlformats.org/officeDocument/2006/relationships" xmlns:p="http://schemas.openxmlformats.org/presentationml/2006/main">
   <p:cSld>
+    <p:bg>
+      <p:bgRef idx="1001">
+        <a:schemeClr val="bg1"/>
+      </p:bgRef>
+    </p:bg>
     <p:spTree>
       <p:nvGrpSpPr>
         <p:cNvPr id="1" name=""/>
@@ -4562,6 +4397,13 @@
           </a:solidFill>
           <a:ln/>
         </p:spPr>
+        <p:txBody>
+          <a:bodyPr/>
+          <a:lstStyle/>
+          <a:p>
+            <a:endParaRPr lang="en-PH"/>
+          </a:p>
+        </p:txBody>
       </p:sp>
       <p:sp>
         <p:nvSpPr>
@@ -4584,11 +4426,11 @@
           <a:bodyPr wrap="square" lIns="0" tIns="0" rIns="0" bIns="0" rtlCol="0" anchor="ctr"/>
           <a:lstStyle/>
           <a:p>
-            <a:pPr algn="ctr" indent="0" marL="0">
-              <a:buNone/>
-            </a:pPr>
-            <a:r>
-              <a:rPr lang="en-US" sz="1600" b="1" spc="200" kern="0" dirty="0">
+            <a:pPr marL="0" indent="0" algn="ctr">
+              <a:buNone/>
+            </a:pPr>
+            <a:r>
+              <a:rPr lang="en-US" sz="1600" b="1" kern="0" spc="200" dirty="0">
                 <a:solidFill>
                   <a:srgbClr val="D4A854"/>
                 </a:solidFill>
@@ -4625,7 +4467,7 @@
           </a:bodyPr>
           <a:lstStyle/>
           <a:p>
-            <a:pPr algn="ctr" indent="0" marL="0">
+            <a:pPr marL="0" indent="0" algn="ctr">
               <a:buNone/>
             </a:pPr>
             <a:r>
@@ -4664,7 +4506,7 @@
           <a:bodyPr wrap="square" lIns="0" tIns="0" rIns="0" bIns="0" rtlCol="0" anchor="ctr"/>
           <a:lstStyle/>
           <a:p>
-            <a:pPr algn="ctr" indent="0" marL="0">
+            <a:pPr marL="0" indent="0" algn="ctr">
               <a:buNone/>
             </a:pPr>
             <a:r>
@@ -4703,7 +4545,7 @@
           <a:bodyPr wrap="square" lIns="0" tIns="0" rIns="0" bIns="0" rtlCol="0" anchor="ctr"/>
           <a:lstStyle/>
           <a:p>
-            <a:pPr algn="ctr" indent="0" marL="0">
+            <a:pPr marL="0" indent="0" algn="ctr">
               <a:buNone/>
             </a:pPr>
             <a:r>
@@ -4742,7 +4584,7 @@
           <a:bodyPr wrap="square" lIns="0" tIns="0" rIns="0" bIns="0" rtlCol="0" anchor="ctr"/>
           <a:lstStyle/>
           <a:p>
-            <a:pPr algn="ctr" indent="0" marL="0">
+            <a:pPr marL="0" indent="0" algn="ctr">
               <a:buNone/>
             </a:pPr>
             <a:r>
@@ -4781,6 +4623,13 @@
           </a:solidFill>
           <a:ln/>
         </p:spPr>
+        <p:txBody>
+          <a:bodyPr/>
+          <a:lstStyle/>
+          <a:p>
+            <a:endParaRPr lang="en-PH"/>
+          </a:p>
+        </p:txBody>
       </p:sp>
       <p:sp>
         <p:nvSpPr>
@@ -4803,7 +4652,7 @@
           <a:bodyPr wrap="square" lIns="0" tIns="0" rIns="0" bIns="0" rtlCol="0" anchor="ctr"/>
           <a:lstStyle/>
           <a:p>
-            <a:pPr algn="ctr" indent="0" marL="0">
+            <a:pPr marL="0" indent="0" algn="ctr">
               <a:buNone/>
             </a:pPr>
             <a:r>
@@ -4842,7 +4691,7 @@
           <a:bodyPr wrap="square" lIns="0" tIns="0" rIns="0" bIns="0" rtlCol="0" anchor="ctr"/>
           <a:lstStyle/>
           <a:p>
-            <a:pPr algn="r" indent="0" marL="0">
+            <a:pPr marL="0" indent="0" algn="r">
               <a:buNone/>
             </a:pPr>
             <a:r>
@@ -4904,6 +4753,13 @@
           </a:solidFill>
           <a:ln/>
         </p:spPr>
+        <p:txBody>
+          <a:bodyPr/>
+          <a:lstStyle/>
+          <a:p>
+            <a:endParaRPr lang="en-PH"/>
+          </a:p>
+        </p:txBody>
       </p:sp>
       <p:sp>
         <p:nvSpPr>
@@ -4928,6 +4784,13 @@
             <a:prstDash val="solid"/>
           </a:ln>
         </p:spPr>
+        <p:txBody>
+          <a:bodyPr/>
+          <a:lstStyle/>
+          <a:p>
+            <a:endParaRPr lang="en-PH"/>
+          </a:p>
+        </p:txBody>
       </p:sp>
       <p:sp>
         <p:nvSpPr>
@@ -4950,7 +4813,7 @@
           <a:bodyPr wrap="square" lIns="0" tIns="0" rIns="0" bIns="0" rtlCol="0" anchor="ctr"/>
           <a:lstStyle/>
           <a:p>
-            <a:pPr algn="ctr" indent="0" marL="0">
+            <a:pPr marL="0" indent="0" algn="ctr">
               <a:buNone/>
             </a:pPr>
             <a:r>
@@ -4991,7 +4854,7 @@
           </a:bodyPr>
           <a:lstStyle/>
           <a:p>
-            <a:pPr algn="l" indent="0" marL="0">
+            <a:pPr marL="0" indent="0" algn="l">
               <a:lnSpc>
                 <a:spcPct val="108000"/>
               </a:lnSpc>
@@ -5035,7 +4898,7 @@
           </a:bodyPr>
           <a:lstStyle/>
           <a:p>
-            <a:pPr algn="l" indent="0" marL="0">
+            <a:pPr marL="0" indent="0" algn="l">
               <a:lnSpc>
                 <a:spcPct val="108000"/>
               </a:lnSpc>
@@ -5079,7 +4942,7 @@
           </a:bodyPr>
           <a:lstStyle/>
           <a:p>
-            <a:pPr algn="l" indent="0" marL="0">
+            <a:pPr marL="0" indent="0" algn="l">
               <a:lnSpc>
                 <a:spcPct val="108000"/>
               </a:lnSpc>
@@ -5121,6 +4984,13 @@
           </a:solidFill>
           <a:ln/>
         </p:spPr>
+        <p:txBody>
+          <a:bodyPr/>
+          <a:lstStyle/>
+          <a:p>
+            <a:endParaRPr lang="en-PH"/>
+          </a:p>
+        </p:txBody>
       </p:sp>
       <p:sp>
         <p:nvSpPr>
@@ -5143,7 +5013,7 @@
           <a:bodyPr wrap="square" lIns="0" tIns="0" rIns="0" bIns="0" rtlCol="0" anchor="ctr"/>
           <a:lstStyle/>
           <a:p>
-            <a:pPr algn="ctr" indent="0" marL="0">
+            <a:pPr marL="0" indent="0" algn="ctr">
               <a:buNone/>
             </a:pPr>
             <a:r>
@@ -5182,7 +5052,7 @@
           <a:bodyPr wrap="square" lIns="0" tIns="0" rIns="0" bIns="0" rtlCol="0" anchor="ctr"/>
           <a:lstStyle/>
           <a:p>
-            <a:pPr algn="r" indent="0" marL="0">
+            <a:pPr marL="0" indent="0" algn="r">
               <a:buNone/>
             </a:pPr>
             <a:r>
@@ -5244,6 +5114,13 @@
           </a:solidFill>
           <a:ln/>
         </p:spPr>
+        <p:txBody>
+          <a:bodyPr/>
+          <a:lstStyle/>
+          <a:p>
+            <a:endParaRPr lang="en-PH"/>
+          </a:p>
+        </p:txBody>
       </p:sp>
       <p:sp>
         <p:nvSpPr>
@@ -5266,7 +5143,7 @@
           <a:bodyPr wrap="square" lIns="0" tIns="0" rIns="0" bIns="0" rtlCol="0" anchor="ctr"/>
           <a:lstStyle/>
           <a:p>
-            <a:pPr indent="0" marL="0">
+            <a:pPr marL="0" indent="0">
               <a:buNone/>
             </a:pPr>
             <a:r>
@@ -5305,7 +5182,7 @@
           <a:bodyPr wrap="square" lIns="0" tIns="0" rIns="0" bIns="0" rtlCol="0" anchor="ctr"/>
           <a:lstStyle/>
           <a:p>
-            <a:pPr indent="0" marL="0">
+            <a:pPr marL="0" indent="0">
               <a:buNone/>
             </a:pPr>
             <a:r>
@@ -5344,6 +5221,13 @@
           </a:solidFill>
           <a:ln/>
         </p:spPr>
+        <p:txBody>
+          <a:bodyPr/>
+          <a:lstStyle/>
+          <a:p>
+            <a:endParaRPr lang="en-PH"/>
+          </a:p>
+        </p:txBody>
       </p:sp>
       <p:sp>
         <p:nvSpPr>
@@ -5366,7 +5250,7 @@
           <a:bodyPr wrap="square" lIns="0" tIns="0" rIns="0" bIns="0" rtlCol="0" anchor="ctr"/>
           <a:lstStyle/>
           <a:p>
-            <a:pPr algn="ctr" indent="0" marL="0">
+            <a:pPr marL="0" indent="0" algn="ctr">
               <a:buNone/>
             </a:pPr>
             <a:r>
@@ -5405,7 +5289,7 @@
           <a:bodyPr wrap="square" lIns="0" tIns="0" rIns="0" bIns="0" rtlCol="0" anchor="t"/>
           <a:lstStyle/>
           <a:p>
-            <a:pPr indent="0" marL="0">
+            <a:pPr marL="0" indent="0">
               <a:lnSpc>
                 <a:spcPct val="106000"/>
               </a:lnSpc>
@@ -5447,7 +5331,7 @@
           <a:bodyPr wrap="square" lIns="0" tIns="0" rIns="0" bIns="0" rtlCol="0" anchor="ctr"/>
           <a:lstStyle/>
           <a:p>
-            <a:pPr indent="0" marL="0">
+            <a:pPr marL="0" indent="0">
               <a:buNone/>
             </a:pPr>
             <a:r>
@@ -5486,6 +5370,13 @@
           </a:solidFill>
           <a:ln/>
         </p:spPr>
+        <p:txBody>
+          <a:bodyPr/>
+          <a:lstStyle/>
+          <a:p>
+            <a:endParaRPr lang="en-PH"/>
+          </a:p>
+        </p:txBody>
       </p:sp>
       <p:sp>
         <p:nvSpPr>
@@ -5508,7 +5399,7 @@
           <a:bodyPr wrap="square" lIns="0" tIns="0" rIns="0" bIns="0" rtlCol="0" anchor="ctr"/>
           <a:lstStyle/>
           <a:p>
-            <a:pPr algn="ctr" indent="0" marL="0">
+            <a:pPr marL="0" indent="0" algn="ctr">
               <a:buNone/>
             </a:pPr>
             <a:r>
@@ -5547,7 +5438,7 @@
           <a:bodyPr wrap="square" lIns="0" tIns="0" rIns="0" bIns="0" rtlCol="0" anchor="ctr"/>
           <a:lstStyle/>
           <a:p>
-            <a:pPr algn="r" indent="0" marL="0">
+            <a:pPr marL="0" indent="0" algn="r">
               <a:buNone/>
             </a:pPr>
             <a:r>
@@ -5609,6 +5500,13 @@
           </a:solidFill>
           <a:ln/>
         </p:spPr>
+        <p:txBody>
+          <a:bodyPr/>
+          <a:lstStyle/>
+          <a:p>
+            <a:endParaRPr lang="en-PH"/>
+          </a:p>
+        </p:txBody>
       </p:sp>
       <p:sp>
         <p:nvSpPr>
@@ -5633,6 +5531,13 @@
             <a:prstDash val="solid"/>
           </a:ln>
         </p:spPr>
+        <p:txBody>
+          <a:bodyPr/>
+          <a:lstStyle/>
+          <a:p>
+            <a:endParaRPr lang="en-PH"/>
+          </a:p>
+        </p:txBody>
       </p:sp>
       <p:sp>
         <p:nvSpPr>
@@ -5655,7 +5560,7 @@
           <a:bodyPr wrap="square" lIns="0" tIns="0" rIns="0" bIns="0" rtlCol="0" anchor="ctr"/>
           <a:lstStyle/>
           <a:p>
-            <a:pPr algn="ctr" indent="0" marL="0">
+            <a:pPr marL="0" indent="0" algn="ctr">
               <a:buNone/>
             </a:pPr>
             <a:r>
@@ -5696,7 +5601,7 @@
           </a:bodyPr>
           <a:lstStyle/>
           <a:p>
-            <a:pPr algn="l" indent="0" marL="0">
+            <a:pPr marL="0" indent="0" algn="l">
               <a:lnSpc>
                 <a:spcPct val="108000"/>
               </a:lnSpc>
@@ -5740,7 +5645,7 @@
           </a:bodyPr>
           <a:lstStyle/>
           <a:p>
-            <a:pPr algn="l" indent="0" marL="0">
+            <a:pPr marL="0" indent="0" algn="l">
               <a:lnSpc>
                 <a:spcPct val="108000"/>
               </a:lnSpc>
@@ -5784,7 +5689,7 @@
           </a:bodyPr>
           <a:lstStyle/>
           <a:p>
-            <a:pPr algn="l" indent="0" marL="0">
+            <a:pPr marL="0" indent="0" algn="l">
               <a:lnSpc>
                 <a:spcPct val="108000"/>
               </a:lnSpc>
@@ -5826,6 +5731,13 @@
           </a:solidFill>
           <a:ln/>
         </p:spPr>
+        <p:txBody>
+          <a:bodyPr/>
+          <a:lstStyle/>
+          <a:p>
+            <a:endParaRPr lang="en-PH"/>
+          </a:p>
+        </p:txBody>
       </p:sp>
       <p:sp>
         <p:nvSpPr>
@@ -5848,7 +5760,7 @@
           <a:bodyPr wrap="square" lIns="0" tIns="0" rIns="0" bIns="0" rtlCol="0" anchor="ctr"/>
           <a:lstStyle/>
           <a:p>
-            <a:pPr algn="ctr" indent="0" marL="0">
+            <a:pPr marL="0" indent="0" algn="ctr">
               <a:buNone/>
             </a:pPr>
             <a:r>
@@ -5887,7 +5799,7 @@
           <a:bodyPr wrap="square" lIns="0" tIns="0" rIns="0" bIns="0" rtlCol="0" anchor="ctr"/>
           <a:lstStyle/>
           <a:p>
-            <a:pPr algn="r" indent="0" marL="0">
+            <a:pPr marL="0" indent="0" algn="r">
               <a:buNone/>
             </a:pPr>
             <a:r>
@@ -5949,6 +5861,13 @@
           </a:solidFill>
           <a:ln/>
         </p:spPr>
+        <p:txBody>
+          <a:bodyPr/>
+          <a:lstStyle/>
+          <a:p>
+            <a:endParaRPr lang="en-PH"/>
+          </a:p>
+        </p:txBody>
       </p:sp>
       <p:sp>
         <p:nvSpPr>
@@ -5971,7 +5890,7 @@
           <a:bodyPr wrap="square" lIns="0" tIns="0" rIns="0" bIns="0" rtlCol="0" anchor="ctr"/>
           <a:lstStyle/>
           <a:p>
-            <a:pPr indent="0" marL="0">
+            <a:pPr marL="0" indent="0">
               <a:buNone/>
             </a:pPr>
             <a:r>
@@ -6010,7 +5929,7 @@
           <a:bodyPr wrap="square" lIns="0" tIns="0" rIns="0" bIns="0" rtlCol="0" anchor="ctr"/>
           <a:lstStyle/>
           <a:p>
-            <a:pPr indent="0" marL="0">
+            <a:pPr marL="0" indent="0">
               <a:buNone/>
             </a:pPr>
             <a:r>
@@ -6049,6 +5968,13 @@
           </a:solidFill>
           <a:ln/>
         </p:spPr>
+        <p:txBody>
+          <a:bodyPr/>
+          <a:lstStyle/>
+          <a:p>
+            <a:endParaRPr lang="en-PH"/>
+          </a:p>
+        </p:txBody>
       </p:sp>
       <p:sp>
         <p:nvSpPr>
@@ -6071,7 +5997,7 @@
           <a:bodyPr wrap="square" lIns="0" tIns="0" rIns="0" bIns="0" rtlCol="0" anchor="ctr"/>
           <a:lstStyle/>
           <a:p>
-            <a:pPr algn="ctr" indent="0" marL="0">
+            <a:pPr marL="0" indent="0" algn="ctr">
               <a:buNone/>
             </a:pPr>
             <a:r>
@@ -6110,7 +6036,7 @@
           <a:bodyPr wrap="square" lIns="0" tIns="0" rIns="0" bIns="0" rtlCol="0" anchor="t"/>
           <a:lstStyle/>
           <a:p>
-            <a:pPr indent="0" marL="0">
+            <a:pPr marL="0" indent="0">
               <a:lnSpc>
                 <a:spcPct val="106000"/>
               </a:lnSpc>
@@ -6152,7 +6078,7 @@
           <a:bodyPr wrap="square" lIns="0" tIns="0" rIns="0" bIns="0" rtlCol="0" anchor="ctr"/>
           <a:lstStyle/>
           <a:p>
-            <a:pPr indent="0" marL="0">
+            <a:pPr marL="0" indent="0">
               <a:buNone/>
             </a:pPr>
             <a:r>
@@ -6191,6 +6117,13 @@
           </a:solidFill>
           <a:ln/>
         </p:spPr>
+        <p:txBody>
+          <a:bodyPr/>
+          <a:lstStyle/>
+          <a:p>
+            <a:endParaRPr lang="en-PH"/>
+          </a:p>
+        </p:txBody>
       </p:sp>
       <p:sp>
         <p:nvSpPr>
@@ -6213,7 +6146,7 @@
           <a:bodyPr wrap="square" lIns="0" tIns="0" rIns="0" bIns="0" rtlCol="0" anchor="ctr"/>
           <a:lstStyle/>
           <a:p>
-            <a:pPr algn="ctr" indent="0" marL="0">
+            <a:pPr marL="0" indent="0" algn="ctr">
               <a:buNone/>
             </a:pPr>
             <a:r>
@@ -6252,7 +6185,7 @@
           <a:bodyPr wrap="square" lIns="0" tIns="0" rIns="0" bIns="0" rtlCol="0" anchor="ctr"/>
           <a:lstStyle/>
           <a:p>
-            <a:pPr algn="r" indent="0" marL="0">
+            <a:pPr marL="0" indent="0" algn="r">
               <a:buNone/>
             </a:pPr>
             <a:r>
@@ -6314,6 +6247,13 @@
           </a:solidFill>
           <a:ln/>
         </p:spPr>
+        <p:txBody>
+          <a:bodyPr/>
+          <a:lstStyle/>
+          <a:p>
+            <a:endParaRPr lang="en-PH"/>
+          </a:p>
+        </p:txBody>
       </p:sp>
       <p:sp>
         <p:nvSpPr>
@@ -6338,6 +6278,13 @@
             <a:prstDash val="solid"/>
           </a:ln>
         </p:spPr>
+        <p:txBody>
+          <a:bodyPr/>
+          <a:lstStyle/>
+          <a:p>
+            <a:endParaRPr lang="en-PH"/>
+          </a:p>
+        </p:txBody>
       </p:sp>
       <p:sp>
         <p:nvSpPr>
@@ -6360,7 +6307,7 @@
           <a:bodyPr wrap="square" lIns="0" tIns="0" rIns="0" bIns="0" rtlCol="0" anchor="ctr"/>
           <a:lstStyle/>
           <a:p>
-            <a:pPr algn="ctr" indent="0" marL="0">
+            <a:pPr marL="0" indent="0" algn="ctr">
               <a:buNone/>
             </a:pPr>
             <a:r>
@@ -6401,7 +6348,7 @@
           </a:bodyPr>
           <a:lstStyle/>
           <a:p>
-            <a:pPr algn="l" indent="0" marL="0">
+            <a:pPr marL="0" indent="0" algn="l">
               <a:lnSpc>
                 <a:spcPct val="108000"/>
               </a:lnSpc>
@@ -6445,7 +6392,7 @@
           </a:bodyPr>
           <a:lstStyle/>
           <a:p>
-            <a:pPr algn="l" indent="0" marL="0">
+            <a:pPr marL="0" indent="0" algn="l">
               <a:lnSpc>
                 <a:spcPct val="108000"/>
               </a:lnSpc>
@@ -6489,7 +6436,7 @@
           </a:bodyPr>
           <a:lstStyle/>
           <a:p>
-            <a:pPr algn="l" indent="0" marL="0">
+            <a:pPr marL="0" indent="0" algn="l">
               <a:lnSpc>
                 <a:spcPct val="108000"/>
               </a:lnSpc>
@@ -6533,7 +6480,7 @@
           </a:bodyPr>
           <a:lstStyle/>
           <a:p>
-            <a:pPr algn="l" indent="0" marL="0">
+            <a:pPr marL="0" indent="0" algn="l">
               <a:lnSpc>
                 <a:spcPct val="108000"/>
               </a:lnSpc>
@@ -6575,6 +6522,13 @@
           </a:solidFill>
           <a:ln/>
         </p:spPr>
+        <p:txBody>
+          <a:bodyPr/>
+          <a:lstStyle/>
+          <a:p>
+            <a:endParaRPr lang="en-PH"/>
+          </a:p>
+        </p:txBody>
       </p:sp>
       <p:sp>
         <p:nvSpPr>
@@ -6597,7 +6551,7 @@
           <a:bodyPr wrap="square" lIns="0" tIns="0" rIns="0" bIns="0" rtlCol="0" anchor="ctr"/>
           <a:lstStyle/>
           <a:p>
-            <a:pPr algn="ctr" indent="0" marL="0">
+            <a:pPr marL="0" indent="0" algn="ctr">
               <a:buNone/>
             </a:pPr>
             <a:r>
@@ -6636,7 +6590,7 @@
           <a:bodyPr wrap="square" lIns="0" tIns="0" rIns="0" bIns="0" rtlCol="0" anchor="ctr"/>
           <a:lstStyle/>
           <a:p>
-            <a:pPr algn="r" indent="0" marL="0">
+            <a:pPr marL="0" indent="0" algn="r">
               <a:buNone/>
             </a:pPr>
             <a:r>
@@ -6698,6 +6652,13 @@
           </a:solidFill>
           <a:ln/>
         </p:spPr>
+        <p:txBody>
+          <a:bodyPr/>
+          <a:lstStyle/>
+          <a:p>
+            <a:endParaRPr lang="en-PH"/>
+          </a:p>
+        </p:txBody>
       </p:sp>
       <p:sp>
         <p:nvSpPr>
@@ -6720,7 +6681,7 @@
           <a:bodyPr wrap="square" lIns="0" tIns="0" rIns="0" bIns="0" rtlCol="0" anchor="ctr"/>
           <a:lstStyle/>
           <a:p>
-            <a:pPr indent="0" marL="0">
+            <a:pPr marL="0" indent="0">
               <a:buNone/>
             </a:pPr>
             <a:r>
@@ -6759,7 +6720,7 @@
           <a:bodyPr wrap="square" lIns="0" tIns="0" rIns="0" bIns="0" rtlCol="0" anchor="ctr"/>
           <a:lstStyle/>
           <a:p>
-            <a:pPr indent="0" marL="0">
+            <a:pPr marL="0" indent="0">
               <a:buNone/>
             </a:pPr>
             <a:r>
@@ -6798,6 +6759,13 @@
           </a:solidFill>
           <a:ln/>
         </p:spPr>
+        <p:txBody>
+          <a:bodyPr/>
+          <a:lstStyle/>
+          <a:p>
+            <a:endParaRPr lang="en-PH"/>
+          </a:p>
+        </p:txBody>
       </p:sp>
       <p:sp>
         <p:nvSpPr>
@@ -6820,7 +6788,7 @@
           <a:bodyPr wrap="square" lIns="0" tIns="0" rIns="0" bIns="0" rtlCol="0" anchor="ctr"/>
           <a:lstStyle/>
           <a:p>
-            <a:pPr algn="ctr" indent="0" marL="0">
+            <a:pPr marL="0" indent="0" algn="ctr">
               <a:buNone/>
             </a:pPr>
             <a:r>
@@ -6859,7 +6827,7 @@
           <a:bodyPr wrap="square" lIns="0" tIns="0" rIns="0" bIns="0" rtlCol="0" anchor="t"/>
           <a:lstStyle/>
           <a:p>
-            <a:pPr indent="0" marL="0">
+            <a:pPr marL="0" indent="0">
               <a:lnSpc>
                 <a:spcPct val="106000"/>
               </a:lnSpc>
@@ -6901,7 +6869,7 @@
           <a:bodyPr wrap="square" lIns="0" tIns="0" rIns="0" bIns="0" rtlCol="0" anchor="ctr"/>
           <a:lstStyle/>
           <a:p>
-            <a:pPr indent="0" marL="0">
+            <a:pPr marL="0" indent="0">
               <a:buNone/>
             </a:pPr>
             <a:r>
@@ -6940,6 +6908,13 @@
           </a:solidFill>
           <a:ln/>
         </p:spPr>
+        <p:txBody>
+          <a:bodyPr/>
+          <a:lstStyle/>
+          <a:p>
+            <a:endParaRPr lang="en-PH"/>
+          </a:p>
+        </p:txBody>
       </p:sp>
       <p:sp>
         <p:nvSpPr>
@@ -6962,7 +6937,7 @@
           <a:bodyPr wrap="square" lIns="0" tIns="0" rIns="0" bIns="0" rtlCol="0" anchor="ctr"/>
           <a:lstStyle/>
           <a:p>
-            <a:pPr algn="ctr" indent="0" marL="0">
+            <a:pPr marL="0" indent="0" algn="ctr">
               <a:buNone/>
             </a:pPr>
             <a:r>
@@ -7001,7 +6976,7 @@
           <a:bodyPr wrap="square" lIns="0" tIns="0" rIns="0" bIns="0" rtlCol="0" anchor="ctr"/>
           <a:lstStyle/>
           <a:p>
-            <a:pPr algn="r" indent="0" marL="0">
+            <a:pPr marL="0" indent="0" algn="r">
               <a:buNone/>
             </a:pPr>
             <a:r>
@@ -7063,6 +7038,13 @@
           </a:solidFill>
           <a:ln/>
         </p:spPr>
+        <p:txBody>
+          <a:bodyPr/>
+          <a:lstStyle/>
+          <a:p>
+            <a:endParaRPr lang="en-PH"/>
+          </a:p>
+        </p:txBody>
       </p:sp>
       <p:sp>
         <p:nvSpPr>
@@ -7087,6 +7069,13 @@
             <a:prstDash val="solid"/>
           </a:ln>
         </p:spPr>
+        <p:txBody>
+          <a:bodyPr/>
+          <a:lstStyle/>
+          <a:p>
+            <a:endParaRPr lang="en-PH"/>
+          </a:p>
+        </p:txBody>
       </p:sp>
       <p:sp>
         <p:nvSpPr>
@@ -7109,7 +7098,7 @@
           <a:bodyPr wrap="square" lIns="0" tIns="0" rIns="0" bIns="0" rtlCol="0" anchor="ctr"/>
           <a:lstStyle/>
           <a:p>
-            <a:pPr algn="ctr" indent="0" marL="0">
+            <a:pPr marL="0" indent="0" algn="ctr">
               <a:buNone/>
             </a:pPr>
             <a:r>
@@ -7150,7 +7139,7 @@
           </a:bodyPr>
           <a:lstStyle/>
           <a:p>
-            <a:pPr algn="l" indent="0" marL="0">
+            <a:pPr marL="0" indent="0" algn="l">
               <a:lnSpc>
                 <a:spcPct val="108000"/>
               </a:lnSpc>
@@ -7194,7 +7183,7 @@
           </a:bodyPr>
           <a:lstStyle/>
           <a:p>
-            <a:pPr algn="l" indent="0" marL="0">
+            <a:pPr marL="0" indent="0" algn="l">
               <a:lnSpc>
                 <a:spcPct val="108000"/>
               </a:lnSpc>
@@ -7238,7 +7227,7 @@
           </a:bodyPr>
           <a:lstStyle/>
           <a:p>
-            <a:pPr algn="l" indent="0" marL="0">
+            <a:pPr marL="0" indent="0" algn="l">
               <a:lnSpc>
                 <a:spcPct val="108000"/>
               </a:lnSpc>
@@ -7280,6 +7269,13 @@
           </a:solidFill>
           <a:ln/>
         </p:spPr>
+        <p:txBody>
+          <a:bodyPr/>
+          <a:lstStyle/>
+          <a:p>
+            <a:endParaRPr lang="en-PH"/>
+          </a:p>
+        </p:txBody>
       </p:sp>
       <p:sp>
         <p:nvSpPr>
@@ -7302,7 +7298,7 @@
           <a:bodyPr wrap="square" lIns="0" tIns="0" rIns="0" bIns="0" rtlCol="0" anchor="ctr"/>
           <a:lstStyle/>
           <a:p>
-            <a:pPr algn="ctr" indent="0" marL="0">
+            <a:pPr marL="0" indent="0" algn="ctr">
               <a:buNone/>
             </a:pPr>
             <a:r>
@@ -7341,7 +7337,7 @@
           <a:bodyPr wrap="square" lIns="0" tIns="0" rIns="0" bIns="0" rtlCol="0" anchor="ctr"/>
           <a:lstStyle/>
           <a:p>
-            <a:pPr algn="r" indent="0" marL="0">
+            <a:pPr marL="0" indent="0" algn="r">
               <a:buNone/>
             </a:pPr>
             <a:r>
@@ -7403,6 +7399,13 @@
           </a:solidFill>
           <a:ln/>
         </p:spPr>
+        <p:txBody>
+          <a:bodyPr/>
+          <a:lstStyle/>
+          <a:p>
+            <a:endParaRPr lang="en-PH"/>
+          </a:p>
+        </p:txBody>
       </p:sp>
       <p:sp>
         <p:nvSpPr>
@@ -7427,6 +7430,13 @@
             <a:prstDash val="solid"/>
           </a:ln>
         </p:spPr>
+        <p:txBody>
+          <a:bodyPr/>
+          <a:lstStyle/>
+          <a:p>
+            <a:endParaRPr lang="en-PH"/>
+          </a:p>
+        </p:txBody>
       </p:sp>
       <p:sp>
         <p:nvSpPr>
@@ -7449,7 +7459,7 @@
           <a:bodyPr wrap="square" lIns="0" tIns="0" rIns="0" bIns="0" rtlCol="0" anchor="ctr"/>
           <a:lstStyle/>
           <a:p>
-            <a:pPr algn="ctr" indent="0" marL="0">
+            <a:pPr marL="0" indent="0" algn="ctr">
               <a:buNone/>
             </a:pPr>
             <a:r>
@@ -7490,7 +7500,7 @@
           </a:bodyPr>
           <a:lstStyle/>
           <a:p>
-            <a:pPr algn="l" indent="0" marL="0">
+            <a:pPr marL="0" indent="0" algn="l">
               <a:lnSpc>
                 <a:spcPct val="108000"/>
               </a:lnSpc>
@@ -7534,7 +7544,7 @@
           </a:bodyPr>
           <a:lstStyle/>
           <a:p>
-            <a:pPr algn="l" indent="0" marL="0">
+            <a:pPr marL="0" indent="0" algn="l">
               <a:lnSpc>
                 <a:spcPct val="108000"/>
               </a:lnSpc>
@@ -7578,7 +7588,7 @@
           </a:bodyPr>
           <a:lstStyle/>
           <a:p>
-            <a:pPr algn="l" indent="0" marL="0">
+            <a:pPr marL="0" indent="0" algn="l">
               <a:lnSpc>
                 <a:spcPct val="108000"/>
               </a:lnSpc>
@@ -7622,7 +7632,7 @@
           </a:bodyPr>
           <a:lstStyle/>
           <a:p>
-            <a:pPr algn="l" indent="0" marL="0">
+            <a:pPr marL="0" indent="0" algn="l">
               <a:lnSpc>
                 <a:spcPct val="108000"/>
               </a:lnSpc>
@@ -7664,6 +7674,13 @@
           </a:solidFill>
           <a:ln/>
         </p:spPr>
+        <p:txBody>
+          <a:bodyPr/>
+          <a:lstStyle/>
+          <a:p>
+            <a:endParaRPr lang="en-PH"/>
+          </a:p>
+        </p:txBody>
       </p:sp>
       <p:sp>
         <p:nvSpPr>
@@ -7686,7 +7703,7 @@
           <a:bodyPr wrap="square" lIns="0" tIns="0" rIns="0" bIns="0" rtlCol="0" anchor="ctr"/>
           <a:lstStyle/>
           <a:p>
-            <a:pPr algn="ctr" indent="0" marL="0">
+            <a:pPr marL="0" indent="0" algn="ctr">
               <a:buNone/>
             </a:pPr>
             <a:r>
@@ -7725,7 +7742,7 @@
           <a:bodyPr wrap="square" lIns="0" tIns="0" rIns="0" bIns="0" rtlCol="0" anchor="ctr"/>
           <a:lstStyle/>
           <a:p>
-            <a:pPr algn="r" indent="0" marL="0">
+            <a:pPr marL="0" indent="0" algn="r">
               <a:buNone/>
             </a:pPr>
             <a:r>
@@ -7787,6 +7804,13 @@
           </a:solidFill>
           <a:ln/>
         </p:spPr>
+        <p:txBody>
+          <a:bodyPr/>
+          <a:lstStyle/>
+          <a:p>
+            <a:endParaRPr lang="en-PH"/>
+          </a:p>
+        </p:txBody>
       </p:sp>
       <p:sp>
         <p:nvSpPr>
@@ -7811,6 +7835,13 @@
             <a:prstDash val="solid"/>
           </a:ln>
         </p:spPr>
+        <p:txBody>
+          <a:bodyPr/>
+          <a:lstStyle/>
+          <a:p>
+            <a:endParaRPr lang="en-PH"/>
+          </a:p>
+        </p:txBody>
       </p:sp>
       <p:sp>
         <p:nvSpPr>
@@ -7833,7 +7864,7 @@
           <a:bodyPr wrap="square" lIns="0" tIns="0" rIns="0" bIns="0" rtlCol="0" anchor="ctr"/>
           <a:lstStyle/>
           <a:p>
-            <a:pPr algn="ctr" indent="0" marL="0">
+            <a:pPr marL="0" indent="0" algn="ctr">
               <a:buNone/>
             </a:pPr>
             <a:r>
@@ -7874,7 +7905,7 @@
           </a:bodyPr>
           <a:lstStyle/>
           <a:p>
-            <a:pPr algn="l" indent="0" marL="0">
+            <a:pPr marL="0" indent="0" algn="l">
               <a:lnSpc>
                 <a:spcPct val="108000"/>
               </a:lnSpc>
@@ -7918,7 +7949,7 @@
           </a:bodyPr>
           <a:lstStyle/>
           <a:p>
-            <a:pPr algn="l" indent="0" marL="0">
+            <a:pPr marL="0" indent="0" algn="l">
               <a:lnSpc>
                 <a:spcPct val="108000"/>
               </a:lnSpc>
@@ -7962,7 +7993,7 @@
           </a:bodyPr>
           <a:lstStyle/>
           <a:p>
-            <a:pPr algn="l" indent="0" marL="0">
+            <a:pPr marL="0" indent="0" algn="l">
               <a:lnSpc>
                 <a:spcPct val="108000"/>
               </a:lnSpc>
@@ -8004,6 +8035,13 @@
           </a:solidFill>
           <a:ln/>
         </p:spPr>
+        <p:txBody>
+          <a:bodyPr/>
+          <a:lstStyle/>
+          <a:p>
+            <a:endParaRPr lang="en-PH"/>
+          </a:p>
+        </p:txBody>
       </p:sp>
       <p:sp>
         <p:nvSpPr>
@@ -8026,7 +8064,7 @@
           <a:bodyPr wrap="square" lIns="0" tIns="0" rIns="0" bIns="0" rtlCol="0" anchor="ctr"/>
           <a:lstStyle/>
           <a:p>
-            <a:pPr algn="ctr" indent="0" marL="0">
+            <a:pPr marL="0" indent="0" algn="ctr">
               <a:buNone/>
             </a:pPr>
             <a:r>
@@ -8065,7 +8103,7 @@
           <a:bodyPr wrap="square" lIns="0" tIns="0" rIns="0" bIns="0" rtlCol="0" anchor="ctr"/>
           <a:lstStyle/>
           <a:p>
-            <a:pPr algn="r" indent="0" marL="0">
+            <a:pPr marL="0" indent="0" algn="r">
               <a:buNone/>
             </a:pPr>
             <a:r>
@@ -8127,6 +8165,13 @@
           </a:solidFill>
           <a:ln/>
         </p:spPr>
+        <p:txBody>
+          <a:bodyPr/>
+          <a:lstStyle/>
+          <a:p>
+            <a:endParaRPr lang="en-PH"/>
+          </a:p>
+        </p:txBody>
       </p:sp>
       <p:sp>
         <p:nvSpPr>
@@ -8149,7 +8194,7 @@
           <a:bodyPr wrap="square" lIns="0" tIns="0" rIns="0" bIns="0" rtlCol="0" anchor="ctr"/>
           <a:lstStyle/>
           <a:p>
-            <a:pPr indent="0" marL="0">
+            <a:pPr marL="0" indent="0">
               <a:buNone/>
             </a:pPr>
             <a:r>
@@ -8188,7 +8233,7 @@
           <a:bodyPr wrap="square" lIns="0" tIns="0" rIns="0" bIns="0" rtlCol="0" anchor="ctr"/>
           <a:lstStyle/>
           <a:p>
-            <a:pPr indent="0" marL="0">
+            <a:pPr marL="0" indent="0">
               <a:buNone/>
             </a:pPr>
             <a:r>
@@ -8227,6 +8272,13 @@
           </a:solidFill>
           <a:ln/>
         </p:spPr>
+        <p:txBody>
+          <a:bodyPr/>
+          <a:lstStyle/>
+          <a:p>
+            <a:endParaRPr lang="en-PH"/>
+          </a:p>
+        </p:txBody>
       </p:sp>
       <p:sp>
         <p:nvSpPr>
@@ -8249,7 +8301,7 @@
           <a:bodyPr wrap="square" lIns="0" tIns="0" rIns="0" bIns="0" rtlCol="0" anchor="ctr"/>
           <a:lstStyle/>
           <a:p>
-            <a:pPr algn="ctr" indent="0" marL="0">
+            <a:pPr marL="0" indent="0" algn="ctr">
               <a:buNone/>
             </a:pPr>
             <a:r>
@@ -8288,7 +8340,7 @@
           <a:bodyPr wrap="square" lIns="0" tIns="0" rIns="0" bIns="0" rtlCol="0" anchor="t"/>
           <a:lstStyle/>
           <a:p>
-            <a:pPr indent="0" marL="0">
+            <a:pPr marL="0" indent="0">
               <a:lnSpc>
                 <a:spcPct val="106000"/>
               </a:lnSpc>
@@ -8330,7 +8382,7 @@
           <a:bodyPr wrap="square" lIns="0" tIns="0" rIns="0" bIns="0" rtlCol="0" anchor="ctr"/>
           <a:lstStyle/>
           <a:p>
-            <a:pPr indent="0" marL="0">
+            <a:pPr marL="0" indent="0">
               <a:buNone/>
             </a:pPr>
             <a:r>
@@ -8369,6 +8421,13 @@
           </a:solidFill>
           <a:ln/>
         </p:spPr>
+        <p:txBody>
+          <a:bodyPr/>
+          <a:lstStyle/>
+          <a:p>
+            <a:endParaRPr lang="en-PH"/>
+          </a:p>
+        </p:txBody>
       </p:sp>
       <p:sp>
         <p:nvSpPr>
@@ -8391,7 +8450,7 @@
           <a:bodyPr wrap="square" lIns="0" tIns="0" rIns="0" bIns="0" rtlCol="0" anchor="ctr"/>
           <a:lstStyle/>
           <a:p>
-            <a:pPr algn="ctr" indent="0" marL="0">
+            <a:pPr marL="0" indent="0" algn="ctr">
               <a:buNone/>
             </a:pPr>
             <a:r>
@@ -8430,7 +8489,7 @@
           <a:bodyPr wrap="square" lIns="0" tIns="0" rIns="0" bIns="0" rtlCol="0" anchor="ctr"/>
           <a:lstStyle/>
           <a:p>
-            <a:pPr algn="r" indent="0" marL="0">
+            <a:pPr marL="0" indent="0" algn="r">
               <a:buNone/>
             </a:pPr>
             <a:r>
@@ -8492,6 +8551,13 @@
           </a:solidFill>
           <a:ln/>
         </p:spPr>
+        <p:txBody>
+          <a:bodyPr/>
+          <a:lstStyle/>
+          <a:p>
+            <a:endParaRPr lang="en-PH"/>
+          </a:p>
+        </p:txBody>
       </p:sp>
       <p:sp>
         <p:nvSpPr>
@@ -8516,6 +8582,13 @@
             <a:prstDash val="solid"/>
           </a:ln>
         </p:spPr>
+        <p:txBody>
+          <a:bodyPr/>
+          <a:lstStyle/>
+          <a:p>
+            <a:endParaRPr lang="en-PH"/>
+          </a:p>
+        </p:txBody>
       </p:sp>
       <p:sp>
         <p:nvSpPr>
@@ -8538,7 +8611,7 @@
           <a:bodyPr wrap="square" lIns="0" tIns="0" rIns="0" bIns="0" rtlCol="0" anchor="ctr"/>
           <a:lstStyle/>
           <a:p>
-            <a:pPr algn="ctr" indent="0" marL="0">
+            <a:pPr marL="0" indent="0" algn="ctr">
               <a:buNone/>
             </a:pPr>
             <a:r>
@@ -8579,7 +8652,7 @@
           </a:bodyPr>
           <a:lstStyle/>
           <a:p>
-            <a:pPr algn="l" indent="0" marL="0">
+            <a:pPr marL="0" indent="0" algn="l">
               <a:lnSpc>
                 <a:spcPct val="108000"/>
               </a:lnSpc>
@@ -8623,7 +8696,7 @@
           </a:bodyPr>
           <a:lstStyle/>
           <a:p>
-            <a:pPr algn="l" indent="0" marL="0">
+            <a:pPr marL="0" indent="0" algn="l">
               <a:lnSpc>
                 <a:spcPct val="108000"/>
               </a:lnSpc>
@@ -8667,7 +8740,7 @@
           </a:bodyPr>
           <a:lstStyle/>
           <a:p>
-            <a:pPr algn="l" indent="0" marL="0">
+            <a:pPr marL="0" indent="0" algn="l">
               <a:lnSpc>
                 <a:spcPct val="108000"/>
               </a:lnSpc>
@@ -8709,6 +8782,13 @@
           </a:solidFill>
           <a:ln/>
         </p:spPr>
+        <p:txBody>
+          <a:bodyPr/>
+          <a:lstStyle/>
+          <a:p>
+            <a:endParaRPr lang="en-PH"/>
+          </a:p>
+        </p:txBody>
       </p:sp>
       <p:sp>
         <p:nvSpPr>
@@ -8731,7 +8811,7 @@
           <a:bodyPr wrap="square" lIns="0" tIns="0" rIns="0" bIns="0" rtlCol="0" anchor="ctr"/>
           <a:lstStyle/>
           <a:p>
-            <a:pPr algn="ctr" indent="0" marL="0">
+            <a:pPr marL="0" indent="0" algn="ctr">
               <a:buNone/>
             </a:pPr>
             <a:r>
@@ -8770,7 +8850,7 @@
           <a:bodyPr wrap="square" lIns="0" tIns="0" rIns="0" bIns="0" rtlCol="0" anchor="ctr"/>
           <a:lstStyle/>
           <a:p>
-            <a:pPr algn="r" indent="0" marL="0">
+            <a:pPr marL="0" indent="0" algn="r">
               <a:buNone/>
             </a:pPr>
             <a:r>
@@ -8832,6 +8912,13 @@
           </a:solidFill>
           <a:ln/>
         </p:spPr>
+        <p:txBody>
+          <a:bodyPr/>
+          <a:lstStyle/>
+          <a:p>
+            <a:endParaRPr lang="en-PH"/>
+          </a:p>
+        </p:txBody>
       </p:sp>
       <p:sp>
         <p:nvSpPr>
@@ -8854,7 +8941,7 @@
           <a:bodyPr wrap="square" lIns="0" tIns="0" rIns="0" bIns="0" rtlCol="0" anchor="ctr"/>
           <a:lstStyle/>
           <a:p>
-            <a:pPr indent="0" marL="0">
+            <a:pPr marL="0" indent="0">
               <a:buNone/>
             </a:pPr>
             <a:r>
@@ -8893,7 +8980,7 @@
           <a:bodyPr wrap="square" lIns="0" tIns="0" rIns="0" bIns="0" rtlCol="0" anchor="ctr"/>
           <a:lstStyle/>
           <a:p>
-            <a:pPr indent="0" marL="0">
+            <a:pPr marL="0" indent="0">
               <a:buNone/>
             </a:pPr>
             <a:r>
@@ -8932,6 +9019,13 @@
           </a:solidFill>
           <a:ln/>
         </p:spPr>
+        <p:txBody>
+          <a:bodyPr/>
+          <a:lstStyle/>
+          <a:p>
+            <a:endParaRPr lang="en-PH"/>
+          </a:p>
+        </p:txBody>
       </p:sp>
       <p:sp>
         <p:nvSpPr>
@@ -8954,7 +9048,7 @@
           <a:bodyPr wrap="square" lIns="0" tIns="0" rIns="0" bIns="0" rtlCol="0" anchor="ctr"/>
           <a:lstStyle/>
           <a:p>
-            <a:pPr algn="ctr" indent="0" marL="0">
+            <a:pPr marL="0" indent="0" algn="ctr">
               <a:buNone/>
             </a:pPr>
             <a:r>
@@ -8993,7 +9087,7 @@
           <a:bodyPr wrap="square" lIns="0" tIns="0" rIns="0" bIns="0" rtlCol="0" anchor="t"/>
           <a:lstStyle/>
           <a:p>
-            <a:pPr indent="0" marL="0">
+            <a:pPr marL="0" indent="0">
               <a:lnSpc>
                 <a:spcPct val="106000"/>
               </a:lnSpc>
@@ -9035,7 +9129,7 @@
           <a:bodyPr wrap="square" lIns="0" tIns="0" rIns="0" bIns="0" rtlCol="0" anchor="ctr"/>
           <a:lstStyle/>
           <a:p>
-            <a:pPr indent="0" marL="0">
+            <a:pPr marL="0" indent="0">
               <a:buNone/>
             </a:pPr>
             <a:r>
@@ -9074,6 +9168,13 @@
           </a:solidFill>
           <a:ln/>
         </p:spPr>
+        <p:txBody>
+          <a:bodyPr/>
+          <a:lstStyle/>
+          <a:p>
+            <a:endParaRPr lang="en-PH"/>
+          </a:p>
+        </p:txBody>
       </p:sp>
       <p:sp>
         <p:nvSpPr>
@@ -9096,7 +9197,7 @@
           <a:bodyPr wrap="square" lIns="0" tIns="0" rIns="0" bIns="0" rtlCol="0" anchor="ctr"/>
           <a:lstStyle/>
           <a:p>
-            <a:pPr algn="ctr" indent="0" marL="0">
+            <a:pPr marL="0" indent="0" algn="ctr">
               <a:buNone/>
             </a:pPr>
             <a:r>
@@ -9135,7 +9236,7 @@
           <a:bodyPr wrap="square" lIns="0" tIns="0" rIns="0" bIns="0" rtlCol="0" anchor="ctr"/>
           <a:lstStyle/>
           <a:p>
-            <a:pPr algn="r" indent="0" marL="0">
+            <a:pPr marL="0" indent="0" algn="r">
               <a:buNone/>
             </a:pPr>
             <a:r>
@@ -9197,6 +9298,13 @@
           </a:solidFill>
           <a:ln/>
         </p:spPr>
+        <p:txBody>
+          <a:bodyPr/>
+          <a:lstStyle/>
+          <a:p>
+            <a:endParaRPr lang="en-PH"/>
+          </a:p>
+        </p:txBody>
       </p:sp>
       <p:sp>
         <p:nvSpPr>
@@ -9221,6 +9329,13 @@
             <a:prstDash val="solid"/>
           </a:ln>
         </p:spPr>
+        <p:txBody>
+          <a:bodyPr/>
+          <a:lstStyle/>
+          <a:p>
+            <a:endParaRPr lang="en-PH"/>
+          </a:p>
+        </p:txBody>
       </p:sp>
       <p:sp>
         <p:nvSpPr>
@@ -9243,7 +9358,7 @@
           <a:bodyPr wrap="square" lIns="0" tIns="0" rIns="0" bIns="0" rtlCol="0" anchor="ctr"/>
           <a:lstStyle/>
           <a:p>
-            <a:pPr algn="ctr" indent="0" marL="0">
+            <a:pPr marL="0" indent="0" algn="ctr">
               <a:buNone/>
             </a:pPr>
             <a:r>
@@ -9284,7 +9399,7 @@
           </a:bodyPr>
           <a:lstStyle/>
           <a:p>
-            <a:pPr algn="l" indent="0" marL="0">
+            <a:pPr marL="0" indent="0" algn="l">
               <a:lnSpc>
                 <a:spcPct val="108000"/>
               </a:lnSpc>
@@ -9328,7 +9443,7 @@
           </a:bodyPr>
           <a:lstStyle/>
           <a:p>
-            <a:pPr algn="l" indent="0" marL="0">
+            <a:pPr marL="0" indent="0" algn="l">
               <a:lnSpc>
                 <a:spcPct val="108000"/>
               </a:lnSpc>
@@ -9372,7 +9487,7 @@
           </a:bodyPr>
           <a:lstStyle/>
           <a:p>
-            <a:pPr algn="l" indent="0" marL="0">
+            <a:pPr marL="0" indent="0" algn="l">
               <a:lnSpc>
                 <a:spcPct val="108000"/>
               </a:lnSpc>
@@ -9416,7 +9531,7 @@
           </a:bodyPr>
           <a:lstStyle/>
           <a:p>
-            <a:pPr algn="l" indent="0" marL="0">
+            <a:pPr marL="0" indent="0" algn="l">
               <a:lnSpc>
                 <a:spcPct val="108000"/>
               </a:lnSpc>
@@ -9458,6 +9573,13 @@
           </a:solidFill>
           <a:ln/>
         </p:spPr>
+        <p:txBody>
+          <a:bodyPr/>
+          <a:lstStyle/>
+          <a:p>
+            <a:endParaRPr lang="en-PH"/>
+          </a:p>
+        </p:txBody>
       </p:sp>
       <p:sp>
         <p:nvSpPr>
@@ -9480,7 +9602,7 @@
           <a:bodyPr wrap="square" lIns="0" tIns="0" rIns="0" bIns="0" rtlCol="0" anchor="ctr"/>
           <a:lstStyle/>
           <a:p>
-            <a:pPr algn="ctr" indent="0" marL="0">
+            <a:pPr marL="0" indent="0" algn="ctr">
               <a:buNone/>
             </a:pPr>
             <a:r>
@@ -9519,7 +9641,7 @@
           <a:bodyPr wrap="square" lIns="0" tIns="0" rIns="0" bIns="0" rtlCol="0" anchor="ctr"/>
           <a:lstStyle/>
           <a:p>
-            <a:pPr algn="r" indent="0" marL="0">
+            <a:pPr marL="0" indent="0" algn="r">
               <a:buNone/>
             </a:pPr>
             <a:r>
@@ -9581,6 +9703,13 @@
           </a:solidFill>
           <a:ln/>
         </p:spPr>
+        <p:txBody>
+          <a:bodyPr/>
+          <a:lstStyle/>
+          <a:p>
+            <a:endParaRPr lang="en-PH"/>
+          </a:p>
+        </p:txBody>
       </p:sp>
       <p:sp>
         <p:nvSpPr>
@@ -9603,7 +9732,7 @@
           <a:bodyPr wrap="square" lIns="0" tIns="0" rIns="0" bIns="0" rtlCol="0" anchor="ctr"/>
           <a:lstStyle/>
           <a:p>
-            <a:pPr indent="0" marL="0">
+            <a:pPr marL="0" indent="0">
               <a:buNone/>
             </a:pPr>
             <a:r>
@@ -9642,7 +9771,7 @@
           <a:bodyPr wrap="square" lIns="0" tIns="0" rIns="0" bIns="0" rtlCol="0" anchor="ctr"/>
           <a:lstStyle/>
           <a:p>
-            <a:pPr indent="0" marL="0">
+            <a:pPr marL="0" indent="0">
               <a:buNone/>
             </a:pPr>
             <a:r>
@@ -9681,6 +9810,13 @@
           </a:solidFill>
           <a:ln/>
         </p:spPr>
+        <p:txBody>
+          <a:bodyPr/>
+          <a:lstStyle/>
+          <a:p>
+            <a:endParaRPr lang="en-PH"/>
+          </a:p>
+        </p:txBody>
       </p:sp>
       <p:sp>
         <p:nvSpPr>
@@ -9703,7 +9839,7 @@
           <a:bodyPr wrap="square" lIns="0" tIns="0" rIns="0" bIns="0" rtlCol="0" anchor="ctr"/>
           <a:lstStyle/>
           <a:p>
-            <a:pPr algn="ctr" indent="0" marL="0">
+            <a:pPr marL="0" indent="0" algn="ctr">
               <a:buNone/>
             </a:pPr>
             <a:r>
@@ -9742,7 +9878,7 @@
           <a:bodyPr wrap="square" lIns="0" tIns="0" rIns="0" bIns="0" rtlCol="0" anchor="t"/>
           <a:lstStyle/>
           <a:p>
-            <a:pPr indent="0" marL="0">
+            <a:pPr marL="0" indent="0">
               <a:lnSpc>
                 <a:spcPct val="106000"/>
               </a:lnSpc>
@@ -9784,7 +9920,7 @@
           <a:bodyPr wrap="square" lIns="0" tIns="0" rIns="0" bIns="0" rtlCol="0" anchor="ctr"/>
           <a:lstStyle/>
           <a:p>
-            <a:pPr indent="0" marL="0">
+            <a:pPr marL="0" indent="0">
               <a:buNone/>
             </a:pPr>
             <a:r>
@@ -9823,6 +9959,13 @@
           </a:solidFill>
           <a:ln/>
         </p:spPr>
+        <p:txBody>
+          <a:bodyPr/>
+          <a:lstStyle/>
+          <a:p>
+            <a:endParaRPr lang="en-PH"/>
+          </a:p>
+        </p:txBody>
       </p:sp>
       <p:sp>
         <p:nvSpPr>
@@ -9845,7 +9988,7 @@
           <a:bodyPr wrap="square" lIns="0" tIns="0" rIns="0" bIns="0" rtlCol="0" anchor="ctr"/>
           <a:lstStyle/>
           <a:p>
-            <a:pPr algn="ctr" indent="0" marL="0">
+            <a:pPr marL="0" indent="0" algn="ctr">
               <a:buNone/>
             </a:pPr>
             <a:r>
@@ -9884,7 +10027,7 @@
           <a:bodyPr wrap="square" lIns="0" tIns="0" rIns="0" bIns="0" rtlCol="0" anchor="ctr"/>
           <a:lstStyle/>
           <a:p>
-            <a:pPr algn="r" indent="0" marL="0">
+            <a:pPr marL="0" indent="0" algn="r">
               <a:buNone/>
             </a:pPr>
             <a:r>
@@ -9946,6 +10089,13 @@
           </a:solidFill>
           <a:ln/>
         </p:spPr>
+        <p:txBody>
+          <a:bodyPr/>
+          <a:lstStyle/>
+          <a:p>
+            <a:endParaRPr lang="en-PH"/>
+          </a:p>
+        </p:txBody>
       </p:sp>
       <p:sp>
         <p:nvSpPr>
@@ -9970,6 +10120,13 @@
             <a:prstDash val="solid"/>
           </a:ln>
         </p:spPr>
+        <p:txBody>
+          <a:bodyPr/>
+          <a:lstStyle/>
+          <a:p>
+            <a:endParaRPr lang="en-PH"/>
+          </a:p>
+        </p:txBody>
       </p:sp>
       <p:sp>
         <p:nvSpPr>
@@ -9992,7 +10149,7 @@
           <a:bodyPr wrap="square" lIns="0" tIns="0" rIns="0" bIns="0" rtlCol="0" anchor="ctr"/>
           <a:lstStyle/>
           <a:p>
-            <a:pPr algn="ctr" indent="0" marL="0">
+            <a:pPr marL="0" indent="0" algn="ctr">
               <a:buNone/>
             </a:pPr>
             <a:r>
@@ -10033,7 +10190,7 @@
           </a:bodyPr>
           <a:lstStyle/>
           <a:p>
-            <a:pPr algn="l" indent="0" marL="0">
+            <a:pPr marL="0" indent="0" algn="l">
               <a:lnSpc>
                 <a:spcPct val="108000"/>
               </a:lnSpc>
@@ -10077,7 +10234,7 @@
           </a:bodyPr>
           <a:lstStyle/>
           <a:p>
-            <a:pPr algn="l" indent="0" marL="0">
+            <a:pPr marL="0" indent="0" algn="l">
               <a:lnSpc>
                 <a:spcPct val="108000"/>
               </a:lnSpc>
@@ -10121,7 +10278,7 @@
           </a:bodyPr>
           <a:lstStyle/>
           <a:p>
-            <a:pPr algn="l" indent="0" marL="0">
+            <a:pPr marL="0" indent="0" algn="l">
               <a:lnSpc>
                 <a:spcPct val="108000"/>
               </a:lnSpc>
@@ -10165,7 +10322,7 @@
           </a:bodyPr>
           <a:lstStyle/>
           <a:p>
-            <a:pPr algn="l" indent="0" marL="0">
+            <a:pPr marL="0" indent="0" algn="l">
               <a:lnSpc>
                 <a:spcPct val="108000"/>
               </a:lnSpc>
@@ -10207,6 +10364,13 @@
           </a:solidFill>
           <a:ln/>
         </p:spPr>
+        <p:txBody>
+          <a:bodyPr/>
+          <a:lstStyle/>
+          <a:p>
+            <a:endParaRPr lang="en-PH"/>
+          </a:p>
+        </p:txBody>
       </p:sp>
       <p:sp>
         <p:nvSpPr>
@@ -10229,7 +10393,7 @@
           <a:bodyPr wrap="square" lIns="0" tIns="0" rIns="0" bIns="0" rtlCol="0" anchor="ctr"/>
           <a:lstStyle/>
           <a:p>
-            <a:pPr algn="ctr" indent="0" marL="0">
+            <a:pPr marL="0" indent="0" algn="ctr">
               <a:buNone/>
             </a:pPr>
             <a:r>
@@ -10268,7 +10432,7 @@
           <a:bodyPr wrap="square" lIns="0" tIns="0" rIns="0" bIns="0" rtlCol="0" anchor="ctr"/>
           <a:lstStyle/>
           <a:p>
-            <a:pPr algn="r" indent="0" marL="0">
+            <a:pPr marL="0" indent="0" algn="r">
               <a:buNone/>
             </a:pPr>
             <a:r>
@@ -10330,6 +10494,13 @@
           </a:solidFill>
           <a:ln/>
         </p:spPr>
+        <p:txBody>
+          <a:bodyPr/>
+          <a:lstStyle/>
+          <a:p>
+            <a:endParaRPr lang="en-PH"/>
+          </a:p>
+        </p:txBody>
       </p:sp>
       <p:sp>
         <p:nvSpPr>
@@ -10354,6 +10525,13 @@
             <a:prstDash val="solid"/>
           </a:ln>
         </p:spPr>
+        <p:txBody>
+          <a:bodyPr/>
+          <a:lstStyle/>
+          <a:p>
+            <a:endParaRPr lang="en-PH"/>
+          </a:p>
+        </p:txBody>
       </p:sp>
       <p:sp>
         <p:nvSpPr>
@@ -10376,7 +10554,7 @@
           <a:bodyPr wrap="square" lIns="0" tIns="0" rIns="0" bIns="0" rtlCol="0" anchor="ctr"/>
           <a:lstStyle/>
           <a:p>
-            <a:pPr algn="ctr" indent="0" marL="0">
+            <a:pPr marL="0" indent="0" algn="ctr">
               <a:buNone/>
             </a:pPr>
             <a:r>
@@ -10417,7 +10595,7 @@
           </a:bodyPr>
           <a:lstStyle/>
           <a:p>
-            <a:pPr algn="l" indent="0" marL="0">
+            <a:pPr marL="0" indent="0" algn="l">
               <a:lnSpc>
                 <a:spcPct val="108000"/>
               </a:lnSpc>
@@ -10461,7 +10639,7 @@
           </a:bodyPr>
           <a:lstStyle/>
           <a:p>
-            <a:pPr algn="l" indent="0" marL="0">
+            <a:pPr marL="0" indent="0" algn="l">
               <a:lnSpc>
                 <a:spcPct val="108000"/>
               </a:lnSpc>
@@ -10505,7 +10683,7 @@
           </a:bodyPr>
           <a:lstStyle/>
           <a:p>
-            <a:pPr algn="l" indent="0" marL="0">
+            <a:pPr marL="0" indent="0" algn="l">
               <a:lnSpc>
                 <a:spcPct val="108000"/>
               </a:lnSpc>
@@ -10547,6 +10725,13 @@
           </a:solidFill>
           <a:ln/>
         </p:spPr>
+        <p:txBody>
+          <a:bodyPr/>
+          <a:lstStyle/>
+          <a:p>
+            <a:endParaRPr lang="en-PH"/>
+          </a:p>
+        </p:txBody>
       </p:sp>
       <p:sp>
         <p:nvSpPr>
@@ -10569,7 +10754,7 @@
           <a:bodyPr wrap="square" lIns="0" tIns="0" rIns="0" bIns="0" rtlCol="0" anchor="ctr"/>
           <a:lstStyle/>
           <a:p>
-            <a:pPr algn="ctr" indent="0" marL="0">
+            <a:pPr marL="0" indent="0" algn="ctr">
               <a:buNone/>
             </a:pPr>
             <a:r>
@@ -10608,7 +10793,7 @@
           <a:bodyPr wrap="square" lIns="0" tIns="0" rIns="0" bIns="0" rtlCol="0" anchor="ctr"/>
           <a:lstStyle/>
           <a:p>
-            <a:pPr algn="r" indent="0" marL="0">
+            <a:pPr marL="0" indent="0" algn="r">
               <a:buNone/>
             </a:pPr>
             <a:r>
@@ -10670,6 +10855,13 @@
           </a:solidFill>
           <a:ln/>
         </p:spPr>
+        <p:txBody>
+          <a:bodyPr/>
+          <a:lstStyle/>
+          <a:p>
+            <a:endParaRPr lang="en-PH"/>
+          </a:p>
+        </p:txBody>
       </p:sp>
       <p:sp>
         <p:nvSpPr>
@@ -10694,6 +10886,13 @@
             <a:prstDash val="solid"/>
           </a:ln>
         </p:spPr>
+        <p:txBody>
+          <a:bodyPr/>
+          <a:lstStyle/>
+          <a:p>
+            <a:endParaRPr lang="en-PH"/>
+          </a:p>
+        </p:txBody>
       </p:sp>
       <p:sp>
         <p:nvSpPr>
@@ -10716,7 +10915,7 @@
           <a:bodyPr wrap="square" lIns="0" tIns="0" rIns="0" bIns="0" rtlCol="0" anchor="ctr"/>
           <a:lstStyle/>
           <a:p>
-            <a:pPr algn="ctr" indent="0" marL="0">
+            <a:pPr marL="0" indent="0" algn="ctr">
               <a:buNone/>
             </a:pPr>
             <a:r>
@@ -10757,7 +10956,7 @@
           </a:bodyPr>
           <a:lstStyle/>
           <a:p>
-            <a:pPr algn="l" indent="0" marL="0">
+            <a:pPr marL="0" indent="0" algn="l">
               <a:lnSpc>
                 <a:spcPct val="108000"/>
               </a:lnSpc>
@@ -10801,7 +11000,7 @@
           </a:bodyPr>
           <a:lstStyle/>
           <a:p>
-            <a:pPr algn="l" indent="0" marL="0">
+            <a:pPr marL="0" indent="0" algn="l">
               <a:lnSpc>
                 <a:spcPct val="108000"/>
               </a:lnSpc>
@@ -10845,7 +11044,7 @@
           </a:bodyPr>
           <a:lstStyle/>
           <a:p>
-            <a:pPr algn="l" indent="0" marL="0">
+            <a:pPr marL="0" indent="0" algn="l">
               <a:lnSpc>
                 <a:spcPct val="108000"/>
               </a:lnSpc>
@@ -10889,7 +11088,7 @@
           </a:bodyPr>
           <a:lstStyle/>
           <a:p>
-            <a:pPr algn="l" indent="0" marL="0">
+            <a:pPr marL="0" indent="0" algn="l">
               <a:lnSpc>
                 <a:spcPct val="108000"/>
               </a:lnSpc>
@@ -10933,7 +11132,7 @@
           </a:bodyPr>
           <a:lstStyle/>
           <a:p>
-            <a:pPr algn="l" indent="0" marL="0">
+            <a:pPr marL="0" indent="0" algn="l">
               <a:lnSpc>
                 <a:spcPct val="108000"/>
               </a:lnSpc>
@@ -10975,6 +11174,13 @@
           </a:solidFill>
           <a:ln/>
         </p:spPr>
+        <p:txBody>
+          <a:bodyPr/>
+          <a:lstStyle/>
+          <a:p>
+            <a:endParaRPr lang="en-PH"/>
+          </a:p>
+        </p:txBody>
       </p:sp>
       <p:sp>
         <p:nvSpPr>
@@ -10997,7 +11203,7 @@
           <a:bodyPr wrap="square" lIns="0" tIns="0" rIns="0" bIns="0" rtlCol="0" anchor="ctr"/>
           <a:lstStyle/>
           <a:p>
-            <a:pPr algn="ctr" indent="0" marL="0">
+            <a:pPr marL="0" indent="0" algn="ctr">
               <a:buNone/>
             </a:pPr>
             <a:r>
@@ -11036,7 +11242,7 @@
           <a:bodyPr wrap="square" lIns="0" tIns="0" rIns="0" bIns="0" rtlCol="0" anchor="ctr"/>
           <a:lstStyle/>
           <a:p>
-            <a:pPr algn="r" indent="0" marL="0">
+            <a:pPr marL="0" indent="0" algn="r">
               <a:buNone/>
             </a:pPr>
             <a:r>
@@ -11098,6 +11304,13 @@
           </a:solidFill>
           <a:ln/>
         </p:spPr>
+        <p:txBody>
+          <a:bodyPr/>
+          <a:lstStyle/>
+          <a:p>
+            <a:endParaRPr lang="en-PH"/>
+          </a:p>
+        </p:txBody>
       </p:sp>
       <p:sp>
         <p:nvSpPr>
@@ -11120,7 +11333,7 @@
           <a:bodyPr wrap="square" lIns="0" tIns="0" rIns="0" bIns="0" rtlCol="0" anchor="ctr"/>
           <a:lstStyle/>
           <a:p>
-            <a:pPr indent="0" marL="0">
+            <a:pPr marL="0" indent="0">
               <a:buNone/>
             </a:pPr>
             <a:r>
@@ -11159,7 +11372,7 @@
           <a:bodyPr wrap="square" lIns="0" tIns="0" rIns="0" bIns="0" rtlCol="0" anchor="ctr"/>
           <a:lstStyle/>
           <a:p>
-            <a:pPr indent="0" marL="0">
+            <a:pPr marL="0" indent="0">
               <a:buNone/>
             </a:pPr>
             <a:r>
@@ -11198,6 +11411,13 @@
           </a:solidFill>
           <a:ln/>
         </p:spPr>
+        <p:txBody>
+          <a:bodyPr/>
+          <a:lstStyle/>
+          <a:p>
+            <a:endParaRPr lang="en-PH"/>
+          </a:p>
+        </p:txBody>
       </p:sp>
       <p:sp>
         <p:nvSpPr>
@@ -11220,7 +11440,7 @@
           <a:bodyPr wrap="square" lIns="0" tIns="0" rIns="0" bIns="0" rtlCol="0" anchor="ctr"/>
           <a:lstStyle/>
           <a:p>
-            <a:pPr algn="ctr" indent="0" marL="0">
+            <a:pPr marL="0" indent="0" algn="ctr">
               <a:buNone/>
             </a:pPr>
             <a:r>
@@ -11259,7 +11479,7 @@
           <a:bodyPr wrap="square" lIns="0" tIns="0" rIns="0" bIns="0" rtlCol="0" anchor="t"/>
           <a:lstStyle/>
           <a:p>
-            <a:pPr indent="0" marL="0">
+            <a:pPr marL="0" indent="0">
               <a:lnSpc>
                 <a:spcPct val="106000"/>
               </a:lnSpc>
@@ -11301,7 +11521,7 @@
           <a:bodyPr wrap="square" lIns="0" tIns="0" rIns="0" bIns="0" rtlCol="0" anchor="ctr"/>
           <a:lstStyle/>
           <a:p>
-            <a:pPr indent="0" marL="0">
+            <a:pPr marL="0" indent="0">
               <a:buNone/>
             </a:pPr>
             <a:r>
@@ -11340,6 +11560,13 @@
           </a:solidFill>
           <a:ln/>
         </p:spPr>
+        <p:txBody>
+          <a:bodyPr/>
+          <a:lstStyle/>
+          <a:p>
+            <a:endParaRPr lang="en-PH"/>
+          </a:p>
+        </p:txBody>
       </p:sp>
       <p:sp>
         <p:nvSpPr>
@@ -11362,7 +11589,7 @@
           <a:bodyPr wrap="square" lIns="0" tIns="0" rIns="0" bIns="0" rtlCol="0" anchor="ctr"/>
           <a:lstStyle/>
           <a:p>
-            <a:pPr algn="ctr" indent="0" marL="0">
+            <a:pPr marL="0" indent="0" algn="ctr">
               <a:buNone/>
             </a:pPr>
             <a:r>
@@ -11401,7 +11628,7 @@
           <a:bodyPr wrap="square" lIns="0" tIns="0" rIns="0" bIns="0" rtlCol="0" anchor="ctr"/>
           <a:lstStyle/>
           <a:p>
-            <a:pPr algn="r" indent="0" marL="0">
+            <a:pPr marL="0" indent="0" algn="r">
               <a:buNone/>
             </a:pPr>
             <a:r>
@@ -11463,6 +11690,13 @@
           </a:solidFill>
           <a:ln/>
         </p:spPr>
+        <p:txBody>
+          <a:bodyPr/>
+          <a:lstStyle/>
+          <a:p>
+            <a:endParaRPr lang="en-PH"/>
+          </a:p>
+        </p:txBody>
       </p:sp>
       <p:sp>
         <p:nvSpPr>
@@ -11487,6 +11721,13 @@
             <a:prstDash val="solid"/>
           </a:ln>
         </p:spPr>
+        <p:txBody>
+          <a:bodyPr/>
+          <a:lstStyle/>
+          <a:p>
+            <a:endParaRPr lang="en-PH"/>
+          </a:p>
+        </p:txBody>
       </p:sp>
       <p:sp>
         <p:nvSpPr>
@@ -11509,7 +11750,7 @@
           <a:bodyPr wrap="square" lIns="0" tIns="0" rIns="0" bIns="0" rtlCol="0" anchor="ctr"/>
           <a:lstStyle/>
           <a:p>
-            <a:pPr algn="ctr" indent="0" marL="0">
+            <a:pPr marL="0" indent="0" algn="ctr">
               <a:buNone/>
             </a:pPr>
             <a:r>
@@ -11550,7 +11791,7 @@
           </a:bodyPr>
           <a:lstStyle/>
           <a:p>
-            <a:pPr algn="l" indent="0" marL="0">
+            <a:pPr marL="0" indent="0" algn="l">
               <a:lnSpc>
                 <a:spcPct val="108000"/>
               </a:lnSpc>
@@ -11594,7 +11835,7 @@
           </a:bodyPr>
           <a:lstStyle/>
           <a:p>
-            <a:pPr algn="l" indent="0" marL="0">
+            <a:pPr marL="0" indent="0" algn="l">
               <a:lnSpc>
                 <a:spcPct val="108000"/>
               </a:lnSpc>
@@ -11638,7 +11879,7 @@
           </a:bodyPr>
           <a:lstStyle/>
           <a:p>
-            <a:pPr algn="l" indent="0" marL="0">
+            <a:pPr marL="0" indent="0" algn="l">
               <a:lnSpc>
                 <a:spcPct val="108000"/>
               </a:lnSpc>
@@ -11682,7 +11923,7 @@
           </a:bodyPr>
           <a:lstStyle/>
           <a:p>
-            <a:pPr algn="l" indent="0" marL="0">
+            <a:pPr marL="0" indent="0" algn="l">
               <a:lnSpc>
                 <a:spcPct val="108000"/>
               </a:lnSpc>
@@ -11724,6 +11965,13 @@
           </a:solidFill>
           <a:ln/>
         </p:spPr>
+        <p:txBody>
+          <a:bodyPr/>
+          <a:lstStyle/>
+          <a:p>
+            <a:endParaRPr lang="en-PH"/>
+          </a:p>
+        </p:txBody>
       </p:sp>
       <p:sp>
         <p:nvSpPr>
@@ -11746,7 +11994,7 @@
           <a:bodyPr wrap="square" lIns="0" tIns="0" rIns="0" bIns="0" rtlCol="0" anchor="ctr"/>
           <a:lstStyle/>
           <a:p>
-            <a:pPr algn="ctr" indent="0" marL="0">
+            <a:pPr marL="0" indent="0" algn="ctr">
               <a:buNone/>
             </a:pPr>
             <a:r>
@@ -11785,7 +12033,7 @@
           <a:bodyPr wrap="square" lIns="0" tIns="0" rIns="0" bIns="0" rtlCol="0" anchor="ctr"/>
           <a:lstStyle/>
           <a:p>
-            <a:pPr algn="r" indent="0" marL="0">
+            <a:pPr marL="0" indent="0" algn="r">
               <a:buNone/>
             </a:pPr>
             <a:r>
@@ -11847,6 +12095,13 @@
           </a:solidFill>
           <a:ln/>
         </p:spPr>
+        <p:txBody>
+          <a:bodyPr/>
+          <a:lstStyle/>
+          <a:p>
+            <a:endParaRPr lang="en-PH"/>
+          </a:p>
+        </p:txBody>
       </p:sp>
       <p:sp>
         <p:nvSpPr>
@@ -11871,6 +12126,13 @@
             <a:prstDash val="solid"/>
           </a:ln>
         </p:spPr>
+        <p:txBody>
+          <a:bodyPr/>
+          <a:lstStyle/>
+          <a:p>
+            <a:endParaRPr lang="en-PH"/>
+          </a:p>
+        </p:txBody>
       </p:sp>
       <p:sp>
         <p:nvSpPr>
@@ -11893,7 +12155,7 @@
           <a:bodyPr wrap="square" lIns="0" tIns="0" rIns="0" bIns="0" rtlCol="0" anchor="ctr"/>
           <a:lstStyle/>
           <a:p>
-            <a:pPr algn="ctr" indent="0" marL="0">
+            <a:pPr marL="0" indent="0" algn="ctr">
               <a:buNone/>
             </a:pPr>
             <a:r>
@@ -11934,7 +12196,7 @@
           </a:bodyPr>
           <a:lstStyle/>
           <a:p>
-            <a:pPr algn="l" indent="0" marL="0">
+            <a:pPr marL="0" indent="0" algn="l">
               <a:lnSpc>
                 <a:spcPct val="108000"/>
               </a:lnSpc>
@@ -11978,7 +12240,7 @@
           </a:bodyPr>
           <a:lstStyle/>
           <a:p>
-            <a:pPr algn="l" indent="0" marL="0">
+            <a:pPr marL="0" indent="0" algn="l">
               <a:lnSpc>
                 <a:spcPct val="108000"/>
               </a:lnSpc>
@@ -12022,7 +12284,7 @@
           </a:bodyPr>
           <a:lstStyle/>
           <a:p>
-            <a:pPr algn="l" indent="0" marL="0">
+            <a:pPr marL="0" indent="0" algn="l">
               <a:lnSpc>
                 <a:spcPct val="108000"/>
               </a:lnSpc>
@@ -12064,6 +12326,13 @@
           </a:solidFill>
           <a:ln/>
         </p:spPr>
+        <p:txBody>
+          <a:bodyPr/>
+          <a:lstStyle/>
+          <a:p>
+            <a:endParaRPr lang="en-PH"/>
+          </a:p>
+        </p:txBody>
       </p:sp>
       <p:sp>
         <p:nvSpPr>
@@ -12086,7 +12355,7 @@
           <a:bodyPr wrap="square" lIns="0" tIns="0" rIns="0" bIns="0" rtlCol="0" anchor="ctr"/>
           <a:lstStyle/>
           <a:p>
-            <a:pPr algn="ctr" indent="0" marL="0">
+            <a:pPr marL="0" indent="0" algn="ctr">
               <a:buNone/>
             </a:pPr>
             <a:r>
@@ -12125,7 +12394,7 @@
           <a:bodyPr wrap="square" lIns="0" tIns="0" rIns="0" bIns="0" rtlCol="0" anchor="ctr"/>
           <a:lstStyle/>
           <a:p>
-            <a:pPr algn="r" indent="0" marL="0">
+            <a:pPr marL="0" indent="0" algn="r">
               <a:buNone/>
             </a:pPr>
             <a:r>
@@ -12187,6 +12456,13 @@
           </a:solidFill>
           <a:ln/>
         </p:spPr>
+        <p:txBody>
+          <a:bodyPr/>
+          <a:lstStyle/>
+          <a:p>
+            <a:endParaRPr lang="en-PH"/>
+          </a:p>
+        </p:txBody>
       </p:sp>
       <p:sp>
         <p:nvSpPr>
@@ -12211,6 +12487,13 @@
             <a:prstDash val="solid"/>
           </a:ln>
         </p:spPr>
+        <p:txBody>
+          <a:bodyPr/>
+          <a:lstStyle/>
+          <a:p>
+            <a:endParaRPr lang="en-PH"/>
+          </a:p>
+        </p:txBody>
       </p:sp>
       <p:sp>
         <p:nvSpPr>
@@ -12233,7 +12516,7 @@
           <a:bodyPr wrap="square" lIns="0" tIns="0" rIns="0" bIns="0" rtlCol="0" anchor="ctr"/>
           <a:lstStyle/>
           <a:p>
-            <a:pPr algn="ctr" indent="0" marL="0">
+            <a:pPr marL="0" indent="0" algn="ctr">
               <a:buNone/>
             </a:pPr>
             <a:r>
@@ -12274,7 +12557,7 @@
           </a:bodyPr>
           <a:lstStyle/>
           <a:p>
-            <a:pPr algn="l" indent="0" marL="0">
+            <a:pPr marL="0" indent="0" algn="l">
               <a:lnSpc>
                 <a:spcPct val="108000"/>
               </a:lnSpc>
@@ -12318,7 +12601,7 @@
           </a:bodyPr>
           <a:lstStyle/>
           <a:p>
-            <a:pPr algn="l" indent="0" marL="0">
+            <a:pPr marL="0" indent="0" algn="l">
               <a:lnSpc>
                 <a:spcPct val="108000"/>
               </a:lnSpc>
@@ -12362,7 +12645,7 @@
           </a:bodyPr>
           <a:lstStyle/>
           <a:p>
-            <a:pPr algn="l" indent="0" marL="0">
+            <a:pPr marL="0" indent="0" algn="l">
               <a:lnSpc>
                 <a:spcPct val="108000"/>
               </a:lnSpc>
@@ -12406,7 +12689,7 @@
           </a:bodyPr>
           <a:lstStyle/>
           <a:p>
-            <a:pPr algn="l" indent="0" marL="0">
+            <a:pPr marL="0" indent="0" algn="l">
               <a:lnSpc>
                 <a:spcPct val="108000"/>
               </a:lnSpc>
@@ -12450,7 +12733,7 @@
           </a:bodyPr>
           <a:lstStyle/>
           <a:p>
-            <a:pPr algn="l" indent="0" marL="0">
+            <a:pPr marL="0" indent="0" algn="l">
               <a:lnSpc>
                 <a:spcPct val="108000"/>
               </a:lnSpc>
@@ -12466,50 +12749,6 @@
                 <a:cs typeface="DM Sans" pitchFamily="34" charset="-120"/>
               </a:rPr>
               <a:t>✍️ “Hindi ako owner — manager ako... Tapat na katiwala — sa oras, sa talento, sa pera.”</a:t>
-            </a:r>
-            <a:endParaRPr lang="en-US" sz="2200" dirty="0"/>
-          </a:p>
-        </p:txBody>
-      </p:sp>
-      <p:sp>
-        <p:nvSpPr>
-          <p:cNvPr id="10" name="Text 8"/>
-          <p:cNvSpPr txBox="1"/>
-          <p:nvPr/>
-        </p:nvSpPr>
-        <p:spPr>
-          <a:xfrm>
-            <a:off x="731520" y="5735320"/>
-            <a:ext cx="10725912" cy="384556"/>
-          </a:xfrm>
-          <a:prstGeom prst="rect">
-            <a:avLst/>
-          </a:prstGeom>
-          <a:noFill/>
-          <a:ln/>
-        </p:spPr>
-        <p:txBody>
-          <a:bodyPr wrap="square" lIns="0" tIns="0" rIns="0" bIns="0" rtlCol="0" anchor="t">
-            <a:normAutofit/>
-          </a:bodyPr>
-          <a:lstStyle/>
-          <a:p>
-            <a:pPr algn="l" indent="0" marL="0">
-              <a:lnSpc>
-                <a:spcPct val="108000"/>
-              </a:lnSpc>
-              <a:buNone/>
-            </a:pPr>
-            <a:r>
-              <a:rPr lang="en-US" sz="2200" b="1" dirty="0">
-                <a:solidFill>
-                  <a:srgbClr val="1F4530"/>
-                </a:solidFill>
-                <a:latin typeface="DM Sans" pitchFamily="34" charset="0"/>
-                <a:ea typeface="DM Sans" pitchFamily="34" charset="-122"/>
-                <a:cs typeface="DM Sans" pitchFamily="34" charset="-120"/>
-              </a:rPr>
-              <a:t>Collection ito, hindi correction.</a:t>
             </a:r>
             <a:endParaRPr lang="en-US" sz="2200" dirty="0"/>
           </a:p>
@@ -12536,6 +12775,13 @@
           </a:solidFill>
           <a:ln/>
         </p:spPr>
+        <p:txBody>
+          <a:bodyPr/>
+          <a:lstStyle/>
+          <a:p>
+            <a:endParaRPr lang="en-PH"/>
+          </a:p>
+        </p:txBody>
       </p:sp>
       <p:sp>
         <p:nvSpPr>
@@ -12558,7 +12804,7 @@
           <a:bodyPr wrap="square" lIns="0" tIns="0" rIns="0" bIns="0" rtlCol="0" anchor="ctr"/>
           <a:lstStyle/>
           <a:p>
-            <a:pPr algn="ctr" indent="0" marL="0">
+            <a:pPr marL="0" indent="0" algn="ctr">
               <a:buNone/>
             </a:pPr>
             <a:r>
@@ -12597,7 +12843,7 @@
           <a:bodyPr wrap="square" lIns="0" tIns="0" rIns="0" bIns="0" rtlCol="0" anchor="ctr"/>
           <a:lstStyle/>
           <a:p>
-            <a:pPr algn="r" indent="0" marL="0">
+            <a:pPr marL="0" indent="0" algn="r">
               <a:buNone/>
             </a:pPr>
             <a:r>
@@ -12659,6 +12905,13 @@
           </a:solidFill>
           <a:ln/>
         </p:spPr>
+        <p:txBody>
+          <a:bodyPr/>
+          <a:lstStyle/>
+          <a:p>
+            <a:endParaRPr lang="en-PH"/>
+          </a:p>
+        </p:txBody>
       </p:sp>
       <p:sp>
         <p:nvSpPr>
@@ -12681,7 +12934,7 @@
           <a:bodyPr wrap="square" lIns="0" tIns="0" rIns="0" bIns="0" rtlCol="0" anchor="ctr"/>
           <a:lstStyle/>
           <a:p>
-            <a:pPr indent="0" marL="0">
+            <a:pPr marL="0" indent="0">
               <a:buNone/>
             </a:pPr>
             <a:r>
@@ -12720,7 +12973,7 @@
           <a:bodyPr wrap="square" lIns="0" tIns="0" rIns="0" bIns="0" rtlCol="0" anchor="ctr"/>
           <a:lstStyle/>
           <a:p>
-            <a:pPr indent="0" marL="0">
+            <a:pPr marL="0" indent="0">
               <a:buNone/>
             </a:pPr>
             <a:r>
@@ -12759,6 +13012,13 @@
           </a:solidFill>
           <a:ln/>
         </p:spPr>
+        <p:txBody>
+          <a:bodyPr/>
+          <a:lstStyle/>
+          <a:p>
+            <a:endParaRPr lang="en-PH"/>
+          </a:p>
+        </p:txBody>
       </p:sp>
       <p:sp>
         <p:nvSpPr>
@@ -12781,7 +13041,7 @@
           <a:bodyPr wrap="square" lIns="0" tIns="0" rIns="0" bIns="0" rtlCol="0" anchor="ctr"/>
           <a:lstStyle/>
           <a:p>
-            <a:pPr algn="ctr" indent="0" marL="0">
+            <a:pPr marL="0" indent="0" algn="ctr">
               <a:buNone/>
             </a:pPr>
             <a:r>
@@ -12820,7 +13080,7 @@
           <a:bodyPr wrap="square" lIns="0" tIns="0" rIns="0" bIns="0" rtlCol="0" anchor="t"/>
           <a:lstStyle/>
           <a:p>
-            <a:pPr indent="0" marL="0">
+            <a:pPr marL="0" indent="0">
               <a:lnSpc>
                 <a:spcPct val="106000"/>
               </a:lnSpc>
@@ -12862,7 +13122,7 @@
           <a:bodyPr wrap="square" lIns="0" tIns="0" rIns="0" bIns="0" rtlCol="0" anchor="ctr"/>
           <a:lstStyle/>
           <a:p>
-            <a:pPr indent="0" marL="0">
+            <a:pPr marL="0" indent="0">
               <a:buNone/>
             </a:pPr>
             <a:r>
@@ -12901,6 +13161,13 @@
           </a:solidFill>
           <a:ln/>
         </p:spPr>
+        <p:txBody>
+          <a:bodyPr/>
+          <a:lstStyle/>
+          <a:p>
+            <a:endParaRPr lang="en-PH"/>
+          </a:p>
+        </p:txBody>
       </p:sp>
       <p:sp>
         <p:nvSpPr>
@@ -12923,7 +13190,7 @@
           <a:bodyPr wrap="square" lIns="0" tIns="0" rIns="0" bIns="0" rtlCol="0" anchor="ctr"/>
           <a:lstStyle/>
           <a:p>
-            <a:pPr algn="ctr" indent="0" marL="0">
+            <a:pPr marL="0" indent="0" algn="ctr">
               <a:buNone/>
             </a:pPr>
             <a:r>
@@ -12962,7 +13229,7 @@
           <a:bodyPr wrap="square" lIns="0" tIns="0" rIns="0" bIns="0" rtlCol="0" anchor="ctr"/>
           <a:lstStyle/>
           <a:p>
-            <a:pPr algn="r" indent="0" marL="0">
+            <a:pPr marL="0" indent="0" algn="r">
               <a:buNone/>
             </a:pPr>
             <a:r>
@@ -13024,6 +13291,13 @@
           </a:solidFill>
           <a:ln/>
         </p:spPr>
+        <p:txBody>
+          <a:bodyPr/>
+          <a:lstStyle/>
+          <a:p>
+            <a:endParaRPr lang="en-PH"/>
+          </a:p>
+        </p:txBody>
       </p:sp>
       <p:sp>
         <p:nvSpPr>
@@ -13048,6 +13322,13 @@
             <a:prstDash val="solid"/>
           </a:ln>
         </p:spPr>
+        <p:txBody>
+          <a:bodyPr/>
+          <a:lstStyle/>
+          <a:p>
+            <a:endParaRPr lang="en-PH"/>
+          </a:p>
+        </p:txBody>
       </p:sp>
       <p:sp>
         <p:nvSpPr>
@@ -13070,7 +13351,7 @@
           <a:bodyPr wrap="square" lIns="0" tIns="0" rIns="0" bIns="0" rtlCol="0" anchor="ctr"/>
           <a:lstStyle/>
           <a:p>
-            <a:pPr algn="ctr" indent="0" marL="0">
+            <a:pPr marL="0" indent="0" algn="ctr">
               <a:buNone/>
             </a:pPr>
             <a:r>
@@ -13111,7 +13392,7 @@
           </a:bodyPr>
           <a:lstStyle/>
           <a:p>
-            <a:pPr algn="l" indent="0" marL="0">
+            <a:pPr marL="0" indent="0" algn="l">
               <a:lnSpc>
                 <a:spcPct val="108000"/>
               </a:lnSpc>
@@ -13155,7 +13436,7 @@
           </a:bodyPr>
           <a:lstStyle/>
           <a:p>
-            <a:pPr algn="l" indent="0" marL="0">
+            <a:pPr marL="0" indent="0" algn="l">
               <a:lnSpc>
                 <a:spcPct val="108000"/>
               </a:lnSpc>
@@ -13199,7 +13480,7 @@
           </a:bodyPr>
           <a:lstStyle/>
           <a:p>
-            <a:pPr algn="l" indent="0" marL="0">
+            <a:pPr marL="0" indent="0" algn="l">
               <a:lnSpc>
                 <a:spcPct val="108000"/>
               </a:lnSpc>
@@ -13243,7 +13524,7 @@
           </a:bodyPr>
           <a:lstStyle/>
           <a:p>
-            <a:pPr algn="l" indent="0" marL="0">
+            <a:pPr marL="0" indent="0" algn="l">
               <a:lnSpc>
                 <a:spcPct val="108000"/>
               </a:lnSpc>
@@ -13287,7 +13568,7 @@
           </a:bodyPr>
           <a:lstStyle/>
           <a:p>
-            <a:pPr algn="l" indent="0" marL="0">
+            <a:pPr marL="0" indent="0" algn="l">
               <a:lnSpc>
                 <a:spcPct val="108000"/>
               </a:lnSpc>
@@ -13329,6 +13610,13 @@
           </a:solidFill>
           <a:ln/>
         </p:spPr>
+        <p:txBody>
+          <a:bodyPr/>
+          <a:lstStyle/>
+          <a:p>
+            <a:endParaRPr lang="en-PH"/>
+          </a:p>
+        </p:txBody>
       </p:sp>
       <p:sp>
         <p:nvSpPr>
@@ -13351,7 +13639,7 @@
           <a:bodyPr wrap="square" lIns="0" tIns="0" rIns="0" bIns="0" rtlCol="0" anchor="ctr"/>
           <a:lstStyle/>
           <a:p>
-            <a:pPr algn="ctr" indent="0" marL="0">
+            <a:pPr marL="0" indent="0" algn="ctr">
               <a:buNone/>
             </a:pPr>
             <a:r>
@@ -13390,7 +13678,7 @@
           <a:bodyPr wrap="square" lIns="0" tIns="0" rIns="0" bIns="0" rtlCol="0" anchor="ctr"/>
           <a:lstStyle/>
           <a:p>
-            <a:pPr algn="r" indent="0" marL="0">
+            <a:pPr marL="0" indent="0" algn="r">
               <a:buNone/>
             </a:pPr>
             <a:r>
@@ -13452,6 +13740,13 @@
           </a:solidFill>
           <a:ln/>
         </p:spPr>
+        <p:txBody>
+          <a:bodyPr/>
+          <a:lstStyle/>
+          <a:p>
+            <a:endParaRPr lang="en-PH"/>
+          </a:p>
+        </p:txBody>
       </p:sp>
       <p:sp>
         <p:nvSpPr>
@@ -13474,7 +13769,7 @@
           <a:bodyPr wrap="square" lIns="0" tIns="0" rIns="0" bIns="0" rtlCol="0" anchor="ctr"/>
           <a:lstStyle/>
           <a:p>
-            <a:pPr indent="0" marL="0">
+            <a:pPr marL="0" indent="0">
               <a:buNone/>
             </a:pPr>
             <a:r>
@@ -13513,7 +13808,7 @@
           <a:bodyPr wrap="square" lIns="0" tIns="0" rIns="0" bIns="0" rtlCol="0" anchor="ctr"/>
           <a:lstStyle/>
           <a:p>
-            <a:pPr indent="0" marL="0">
+            <a:pPr marL="0" indent="0">
               <a:buNone/>
             </a:pPr>
             <a:r>
@@ -13552,6 +13847,13 @@
           </a:solidFill>
           <a:ln/>
         </p:spPr>
+        <p:txBody>
+          <a:bodyPr/>
+          <a:lstStyle/>
+          <a:p>
+            <a:endParaRPr lang="en-PH"/>
+          </a:p>
+        </p:txBody>
       </p:sp>
       <p:sp>
         <p:nvSpPr>
@@ -13574,7 +13876,7 @@
           <a:bodyPr wrap="square" lIns="0" tIns="0" rIns="0" bIns="0" rtlCol="0" anchor="ctr"/>
           <a:lstStyle/>
           <a:p>
-            <a:pPr algn="ctr" indent="0" marL="0">
+            <a:pPr marL="0" indent="0" algn="ctr">
               <a:buNone/>
             </a:pPr>
             <a:r>
@@ -13613,7 +13915,7 @@
           <a:bodyPr wrap="square" lIns="0" tIns="0" rIns="0" bIns="0" rtlCol="0" anchor="t"/>
           <a:lstStyle/>
           <a:p>
-            <a:pPr indent="0" marL="0">
+            <a:pPr marL="0" indent="0">
               <a:lnSpc>
                 <a:spcPct val="106000"/>
               </a:lnSpc>
@@ -13655,7 +13957,7 @@
           <a:bodyPr wrap="square" lIns="0" tIns="0" rIns="0" bIns="0" rtlCol="0" anchor="ctr"/>
           <a:lstStyle/>
           <a:p>
-            <a:pPr indent="0" marL="0">
+            <a:pPr marL="0" indent="0">
               <a:buNone/>
             </a:pPr>
             <a:r>
@@ -13694,6 +13996,13 @@
           </a:solidFill>
           <a:ln/>
         </p:spPr>
+        <p:txBody>
+          <a:bodyPr/>
+          <a:lstStyle/>
+          <a:p>
+            <a:endParaRPr lang="en-PH"/>
+          </a:p>
+        </p:txBody>
       </p:sp>
       <p:sp>
         <p:nvSpPr>
@@ -13716,7 +14025,7 @@
           <a:bodyPr wrap="square" lIns="0" tIns="0" rIns="0" bIns="0" rtlCol="0" anchor="ctr"/>
           <a:lstStyle/>
           <a:p>
-            <a:pPr algn="ctr" indent="0" marL="0">
+            <a:pPr marL="0" indent="0" algn="ctr">
               <a:buNone/>
             </a:pPr>
             <a:r>
@@ -13755,7 +14064,7 @@
           <a:bodyPr wrap="square" lIns="0" tIns="0" rIns="0" bIns="0" rtlCol="0" anchor="ctr"/>
           <a:lstStyle/>
           <a:p>
-            <a:pPr algn="r" indent="0" marL="0">
+            <a:pPr marL="0" indent="0" algn="r">
               <a:buNone/>
             </a:pPr>
             <a:r>
@@ -13817,6 +14126,13 @@
           </a:solidFill>
           <a:ln/>
         </p:spPr>
+        <p:txBody>
+          <a:bodyPr/>
+          <a:lstStyle/>
+          <a:p>
+            <a:endParaRPr lang="en-PH"/>
+          </a:p>
+        </p:txBody>
       </p:sp>
       <p:sp>
         <p:nvSpPr>
@@ -13841,6 +14157,13 @@
             <a:prstDash val="solid"/>
           </a:ln>
         </p:spPr>
+        <p:txBody>
+          <a:bodyPr/>
+          <a:lstStyle/>
+          <a:p>
+            <a:endParaRPr lang="en-PH"/>
+          </a:p>
+        </p:txBody>
       </p:sp>
       <p:sp>
         <p:nvSpPr>
@@ -13863,7 +14186,7 @@
           <a:bodyPr wrap="square" lIns="0" tIns="0" rIns="0" bIns="0" rtlCol="0" anchor="ctr"/>
           <a:lstStyle/>
           <a:p>
-            <a:pPr algn="ctr" indent="0" marL="0">
+            <a:pPr marL="0" indent="0" algn="ctr">
               <a:buNone/>
             </a:pPr>
             <a:r>
@@ -13904,7 +14227,7 @@
           </a:bodyPr>
           <a:lstStyle/>
           <a:p>
-            <a:pPr algn="l" indent="0" marL="0">
+            <a:pPr marL="0" indent="0" algn="l">
               <a:lnSpc>
                 <a:spcPct val="108000"/>
               </a:lnSpc>
@@ -13948,7 +14271,7 @@
           </a:bodyPr>
           <a:lstStyle/>
           <a:p>
-            <a:pPr algn="l" indent="0" marL="0">
+            <a:pPr marL="0" indent="0" algn="l">
               <a:lnSpc>
                 <a:spcPct val="108000"/>
               </a:lnSpc>
@@ -13992,7 +14315,7 @@
           </a:bodyPr>
           <a:lstStyle/>
           <a:p>
-            <a:pPr algn="l" indent="0" marL="0">
+            <a:pPr marL="0" indent="0" algn="l">
               <a:lnSpc>
                 <a:spcPct val="108000"/>
               </a:lnSpc>
@@ -14034,6 +14357,13 @@
           </a:solidFill>
           <a:ln/>
         </p:spPr>
+        <p:txBody>
+          <a:bodyPr/>
+          <a:lstStyle/>
+          <a:p>
+            <a:endParaRPr lang="en-PH"/>
+          </a:p>
+        </p:txBody>
       </p:sp>
       <p:sp>
         <p:nvSpPr>
@@ -14056,7 +14386,7 @@
           <a:bodyPr wrap="square" lIns="0" tIns="0" rIns="0" bIns="0" rtlCol="0" anchor="ctr"/>
           <a:lstStyle/>
           <a:p>
-            <a:pPr algn="ctr" indent="0" marL="0">
+            <a:pPr marL="0" indent="0" algn="ctr">
               <a:buNone/>
             </a:pPr>
             <a:r>
@@ -14095,7 +14425,7 @@
           <a:bodyPr wrap="square" lIns="0" tIns="0" rIns="0" bIns="0" rtlCol="0" anchor="ctr"/>
           <a:lstStyle/>
           <a:p>
-            <a:pPr algn="r" indent="0" marL="0">
+            <a:pPr marL="0" indent="0" algn="r">
               <a:buNone/>
             </a:pPr>
             <a:r>
@@ -14157,6 +14487,13 @@
           </a:solidFill>
           <a:ln/>
         </p:spPr>
+        <p:txBody>
+          <a:bodyPr/>
+          <a:lstStyle/>
+          <a:p>
+            <a:endParaRPr lang="en-PH"/>
+          </a:p>
+        </p:txBody>
       </p:sp>
       <p:sp>
         <p:nvSpPr>
@@ -14181,6 +14518,13 @@
             <a:prstDash val="solid"/>
           </a:ln>
         </p:spPr>
+        <p:txBody>
+          <a:bodyPr/>
+          <a:lstStyle/>
+          <a:p>
+            <a:endParaRPr lang="en-PH"/>
+          </a:p>
+        </p:txBody>
       </p:sp>
       <p:sp>
         <p:nvSpPr>
@@ -14203,7 +14547,7 @@
           <a:bodyPr wrap="square" lIns="0" tIns="0" rIns="0" bIns="0" rtlCol="0" anchor="ctr"/>
           <a:lstStyle/>
           <a:p>
-            <a:pPr algn="ctr" indent="0" marL="0">
+            <a:pPr marL="0" indent="0" algn="ctr">
               <a:buNone/>
             </a:pPr>
             <a:r>
@@ -14244,7 +14588,7 @@
           </a:bodyPr>
           <a:lstStyle/>
           <a:p>
-            <a:pPr algn="l" indent="0" marL="0">
+            <a:pPr marL="0" indent="0" algn="l">
               <a:lnSpc>
                 <a:spcPct val="108000"/>
               </a:lnSpc>
@@ -14288,7 +14632,7 @@
           </a:bodyPr>
           <a:lstStyle/>
           <a:p>
-            <a:pPr algn="l" indent="0" marL="0">
+            <a:pPr marL="0" indent="0" algn="l">
               <a:lnSpc>
                 <a:spcPct val="108000"/>
               </a:lnSpc>
@@ -14332,7 +14676,7 @@
           </a:bodyPr>
           <a:lstStyle/>
           <a:p>
-            <a:pPr algn="l" indent="0" marL="0">
+            <a:pPr marL="0" indent="0" algn="l">
               <a:lnSpc>
                 <a:spcPct val="108000"/>
               </a:lnSpc>
@@ -14376,7 +14720,7 @@
           </a:bodyPr>
           <a:lstStyle/>
           <a:p>
-            <a:pPr algn="l" indent="0" marL="0">
+            <a:pPr marL="0" indent="0" algn="l">
               <a:lnSpc>
                 <a:spcPct val="108000"/>
               </a:lnSpc>
@@ -14418,6 +14762,13 @@
           </a:solidFill>
           <a:ln/>
         </p:spPr>
+        <p:txBody>
+          <a:bodyPr/>
+          <a:lstStyle/>
+          <a:p>
+            <a:endParaRPr lang="en-PH"/>
+          </a:p>
+        </p:txBody>
       </p:sp>
       <p:sp>
         <p:nvSpPr>
@@ -14440,7 +14791,7 @@
           <a:bodyPr wrap="square" lIns="0" tIns="0" rIns="0" bIns="0" rtlCol="0" anchor="ctr"/>
           <a:lstStyle/>
           <a:p>
-            <a:pPr algn="ctr" indent="0" marL="0">
+            <a:pPr marL="0" indent="0" algn="ctr">
               <a:buNone/>
             </a:pPr>
             <a:r>
@@ -14479,7 +14830,7 @@
           <a:bodyPr wrap="square" lIns="0" tIns="0" rIns="0" bIns="0" rtlCol="0" anchor="ctr"/>
           <a:lstStyle/>
           <a:p>
-            <a:pPr algn="r" indent="0" marL="0">
+            <a:pPr marL="0" indent="0" algn="r">
               <a:buNone/>
             </a:pPr>
             <a:r>
@@ -14541,6 +14892,13 @@
           </a:solidFill>
           <a:ln/>
         </p:spPr>
+        <p:txBody>
+          <a:bodyPr/>
+          <a:lstStyle/>
+          <a:p>
+            <a:endParaRPr lang="en-PH"/>
+          </a:p>
+        </p:txBody>
       </p:sp>
       <p:sp>
         <p:nvSpPr>
@@ -14565,6 +14923,13 @@
             <a:prstDash val="solid"/>
           </a:ln>
         </p:spPr>
+        <p:txBody>
+          <a:bodyPr/>
+          <a:lstStyle/>
+          <a:p>
+            <a:endParaRPr lang="en-PH"/>
+          </a:p>
+        </p:txBody>
       </p:sp>
       <p:sp>
         <p:nvSpPr>
@@ -14587,7 +14952,7 @@
           <a:bodyPr wrap="square" lIns="0" tIns="0" rIns="0" bIns="0" rtlCol="0" anchor="ctr"/>
           <a:lstStyle/>
           <a:p>
-            <a:pPr algn="ctr" indent="0" marL="0">
+            <a:pPr marL="0" indent="0" algn="ctr">
               <a:buNone/>
             </a:pPr>
             <a:r>
@@ -14628,7 +14993,7 @@
           </a:bodyPr>
           <a:lstStyle/>
           <a:p>
-            <a:pPr algn="l" indent="0" marL="0">
+            <a:pPr marL="0" indent="0" algn="l">
               <a:lnSpc>
                 <a:spcPct val="108000"/>
               </a:lnSpc>
@@ -14672,7 +15037,7 @@
           </a:bodyPr>
           <a:lstStyle/>
           <a:p>
-            <a:pPr algn="l" indent="0" marL="0">
+            <a:pPr marL="0" indent="0" algn="l">
               <a:lnSpc>
                 <a:spcPct val="108000"/>
               </a:lnSpc>
@@ -14716,7 +15081,7 @@
           </a:bodyPr>
           <a:lstStyle/>
           <a:p>
-            <a:pPr algn="l" indent="0" marL="0">
+            <a:pPr marL="0" indent="0" algn="l">
               <a:lnSpc>
                 <a:spcPct val="108000"/>
               </a:lnSpc>
@@ -14760,7 +15125,7 @@
           </a:bodyPr>
           <a:lstStyle/>
           <a:p>
-            <a:pPr algn="l" indent="0" marL="0">
+            <a:pPr marL="0" indent="0" algn="l">
               <a:lnSpc>
                 <a:spcPct val="108000"/>
               </a:lnSpc>
@@ -14804,7 +15169,7 @@
           </a:bodyPr>
           <a:lstStyle/>
           <a:p>
-            <a:pPr algn="l" indent="0" marL="0">
+            <a:pPr marL="0" indent="0" algn="l">
               <a:lnSpc>
                 <a:spcPct val="108000"/>
               </a:lnSpc>
@@ -14846,6 +15211,13 @@
           </a:solidFill>
           <a:ln/>
         </p:spPr>
+        <p:txBody>
+          <a:bodyPr/>
+          <a:lstStyle/>
+          <a:p>
+            <a:endParaRPr lang="en-PH"/>
+          </a:p>
+        </p:txBody>
       </p:sp>
       <p:sp>
         <p:nvSpPr>
@@ -14868,7 +15240,7 @@
           <a:bodyPr wrap="square" lIns="0" tIns="0" rIns="0" bIns="0" rtlCol="0" anchor="ctr"/>
           <a:lstStyle/>
           <a:p>
-            <a:pPr algn="ctr" indent="0" marL="0">
+            <a:pPr marL="0" indent="0" algn="ctr">
               <a:buNone/>
             </a:pPr>
             <a:r>
@@ -14907,7 +15279,7 @@
           <a:bodyPr wrap="square" lIns="0" tIns="0" rIns="0" bIns="0" rtlCol="0" anchor="ctr"/>
           <a:lstStyle/>
           <a:p>
-            <a:pPr algn="r" indent="0" marL="0">
+            <a:pPr marL="0" indent="0" algn="r">
               <a:buNone/>
             </a:pPr>
             <a:r>
@@ -15226,4 +15598,319 @@
     </a:ext>
   </a:extLst>
 </a:theme>
+</file>
+
+<file path=ppt/theme/theme2.xml><?xml version="1.0" encoding="utf-8"?>
+<a:theme xmlns:a="http://schemas.openxmlformats.org/drawingml/2006/main" name="Office Theme">
+  <a:themeElements>
+    <a:clrScheme name="Office">
+      <a:dk1>
+        <a:sysClr val="windowText" lastClr="000000"/>
+      </a:dk1>
+      <a:lt1>
+        <a:sysClr val="window" lastClr="FFFFFF"/>
+      </a:lt1>
+      <a:dk2>
+        <a:srgbClr val="0E2841"/>
+      </a:dk2>
+      <a:lt2>
+        <a:srgbClr val="E8E8E8"/>
+      </a:lt2>
+      <a:accent1>
+        <a:srgbClr val="156082"/>
+      </a:accent1>
+      <a:accent2>
+        <a:srgbClr val="E97132"/>
+      </a:accent2>
+      <a:accent3>
+        <a:srgbClr val="196B24"/>
+      </a:accent3>
+      <a:accent4>
+        <a:srgbClr val="0F9ED5"/>
+      </a:accent4>
+      <a:accent5>
+        <a:srgbClr val="A02B93"/>
+      </a:accent5>
+      <a:accent6>
+        <a:srgbClr val="4EA72E"/>
+      </a:accent6>
+      <a:hlink>
+        <a:srgbClr val="467886"/>
+      </a:hlink>
+      <a:folHlink>
+        <a:srgbClr val="96607D"/>
+      </a:folHlink>
+    </a:clrScheme>
+    <a:fontScheme name="Office">
+      <a:majorFont>
+        <a:latin typeface="Aptos Display" panose="02110004020202020204"/>
+        <a:ea typeface=""/>
+        <a:cs typeface=""/>
+        <a:font script="Jpan" typeface="游ゴシック Light"/>
+        <a:font script="Hang" typeface="맑은 고딕"/>
+        <a:font script="Hans" typeface="等线 Light"/>
+        <a:font script="Hant" typeface="新細明體"/>
+        <a:font script="Arab" typeface="Times New Roman"/>
+        <a:font script="Hebr" typeface="Times New Roman"/>
+        <a:font script="Thai" typeface="Angsana New"/>
+        <a:font script="Ethi" typeface="Nyala"/>
+        <a:font script="Beng" typeface="Vrinda"/>
+        <a:font script="Gujr" typeface="Shruti"/>
+        <a:font script="Khmr" typeface="MoolBoran"/>
+        <a:font script="Knda" typeface="Tunga"/>
+        <a:font script="Guru" typeface="Raavi"/>
+        <a:font script="Cans" typeface="Euphemia"/>
+        <a:font script="Cher" typeface="Plantagenet Cherokee"/>
+        <a:font script="Yiii" typeface="Microsoft Yi Baiti"/>
+        <a:font script="Tibt" typeface="Microsoft Himalaya"/>
+        <a:font script="Thaa" typeface="MV Boli"/>
+        <a:font script="Deva" typeface="Mangal"/>
+        <a:font script="Telu" typeface="Gautami"/>
+        <a:font script="Taml" typeface="Latha"/>
+        <a:font script="Syrc" typeface="Estrangelo Edessa"/>
+        <a:font script="Orya" typeface="Kalinga"/>
+        <a:font script="Mlym" typeface="Kartika"/>
+        <a:font script="Laoo" typeface="DokChampa"/>
+        <a:font script="Sinh" typeface="Iskoola Pota"/>
+        <a:font script="Mong" typeface="Mongolian Baiti"/>
+        <a:font script="Viet" typeface="Times New Roman"/>
+        <a:font script="Uigh" typeface="Microsoft Uighur"/>
+        <a:font script="Geor" typeface="Sylfaen"/>
+        <a:font script="Armn" typeface="Arial"/>
+        <a:font script="Bugi" typeface="Leelawadee UI"/>
+        <a:font script="Bopo" typeface="Microsoft JhengHei"/>
+        <a:font script="Java" typeface="Javanese Text"/>
+        <a:font script="Lisu" typeface="Segoe UI"/>
+        <a:font script="Mymr" typeface="Myanmar Text"/>
+        <a:font script="Nkoo" typeface="Ebrima"/>
+        <a:font script="Olck" typeface="Nirmala UI"/>
+        <a:font script="Osma" typeface="Ebrima"/>
+        <a:font script="Phag" typeface="Phagspa"/>
+        <a:font script="Syrn" typeface="Estrangelo Edessa"/>
+        <a:font script="Syrj" typeface="Estrangelo Edessa"/>
+        <a:font script="Syre" typeface="Estrangelo Edessa"/>
+        <a:font script="Sora" typeface="Nirmala UI"/>
+        <a:font script="Tale" typeface="Microsoft Tai Le"/>
+        <a:font script="Talu" typeface="Microsoft New Tai Lue"/>
+        <a:font script="Tfng" typeface="Ebrima"/>
+      </a:majorFont>
+      <a:minorFont>
+        <a:latin typeface="Aptos" panose="02110004020202020204"/>
+        <a:ea typeface=""/>
+        <a:cs typeface=""/>
+        <a:font script="Jpan" typeface="游ゴシック"/>
+        <a:font script="Hang" typeface="맑은 고딕"/>
+        <a:font script="Hans" typeface="等线"/>
+        <a:font script="Hant" typeface="新細明體"/>
+        <a:font script="Arab" typeface="Arial"/>
+        <a:font script="Hebr" typeface="Arial"/>
+        <a:font script="Thai" typeface="Cordia New"/>
+        <a:font script="Ethi" typeface="Nyala"/>
+        <a:font script="Beng" typeface="Vrinda"/>
+        <a:font script="Gujr" typeface="Shruti"/>
+        <a:font script="Khmr" typeface="DaunPenh"/>
+        <a:font script="Knda" typeface="Tunga"/>
+        <a:font script="Guru" typeface="Raavi"/>
+        <a:font script="Cans" typeface="Euphemia"/>
+        <a:font script="Cher" typeface="Plantagenet Cherokee"/>
+        <a:font script="Yiii" typeface="Microsoft Yi Baiti"/>
+        <a:font script="Tibt" typeface="Microsoft Himalaya"/>
+        <a:font script="Thaa" typeface="MV Boli"/>
+        <a:font script="Deva" typeface="Mangal"/>
+        <a:font script="Telu" typeface="Gautami"/>
+        <a:font script="Taml" typeface="Latha"/>
+        <a:font script="Syrc" typeface="Estrangelo Edessa"/>
+        <a:font script="Orya" typeface="Kalinga"/>
+        <a:font script="Mlym" typeface="Kartika"/>
+        <a:font script="Laoo" typeface="DokChampa"/>
+        <a:font script="Sinh" typeface="Iskoola Pota"/>
+        <a:font script="Mong" typeface="Mongolian Baiti"/>
+        <a:font script="Viet" typeface="Arial"/>
+        <a:font script="Uigh" typeface="Microsoft Uighur"/>
+        <a:font script="Geor" typeface="Sylfaen"/>
+        <a:font script="Armn" typeface="Arial"/>
+        <a:font script="Bugi" typeface="Leelawadee UI"/>
+        <a:font script="Bopo" typeface="Microsoft JhengHei"/>
+        <a:font script="Java" typeface="Javanese Text"/>
+        <a:font script="Lisu" typeface="Segoe UI"/>
+        <a:font script="Mymr" typeface="Myanmar Text"/>
+        <a:font script="Nkoo" typeface="Ebrima"/>
+        <a:font script="Olck" typeface="Nirmala UI"/>
+        <a:font script="Osma" typeface="Ebrima"/>
+        <a:font script="Phag" typeface="Phagspa"/>
+        <a:font script="Syrn" typeface="Estrangelo Edessa"/>
+        <a:font script="Syrj" typeface="Estrangelo Edessa"/>
+        <a:font script="Syre" typeface="Estrangelo Edessa"/>
+        <a:font script="Sora" typeface="Nirmala UI"/>
+        <a:font script="Tale" typeface="Microsoft Tai Le"/>
+        <a:font script="Talu" typeface="Microsoft New Tai Lue"/>
+        <a:font script="Tfng" typeface="Ebrima"/>
+      </a:minorFont>
+    </a:fontScheme>
+    <a:fmtScheme name="Office">
+      <a:fillStyleLst>
+        <a:solidFill>
+          <a:schemeClr val="phClr"/>
+        </a:solidFill>
+        <a:gradFill rotWithShape="1">
+          <a:gsLst>
+            <a:gs pos="0">
+              <a:schemeClr val="phClr">
+                <a:lumMod val="110000"/>
+                <a:satMod val="105000"/>
+                <a:tint val="67000"/>
+              </a:schemeClr>
+            </a:gs>
+            <a:gs pos="50000">
+              <a:schemeClr val="phClr">
+                <a:lumMod val="105000"/>
+                <a:satMod val="103000"/>
+                <a:tint val="73000"/>
+              </a:schemeClr>
+            </a:gs>
+            <a:gs pos="100000">
+              <a:schemeClr val="phClr">
+                <a:lumMod val="105000"/>
+                <a:satMod val="109000"/>
+                <a:tint val="81000"/>
+              </a:schemeClr>
+            </a:gs>
+          </a:gsLst>
+          <a:lin ang="5400000" scaled="0"/>
+        </a:gradFill>
+        <a:gradFill rotWithShape="1">
+          <a:gsLst>
+            <a:gs pos="0">
+              <a:schemeClr val="phClr">
+                <a:satMod val="103000"/>
+                <a:lumMod val="102000"/>
+                <a:tint val="94000"/>
+              </a:schemeClr>
+            </a:gs>
+            <a:gs pos="50000">
+              <a:schemeClr val="phClr">
+                <a:satMod val="110000"/>
+                <a:lumMod val="100000"/>
+                <a:shade val="100000"/>
+              </a:schemeClr>
+            </a:gs>
+            <a:gs pos="100000">
+              <a:schemeClr val="phClr">
+                <a:lumMod val="99000"/>
+                <a:satMod val="120000"/>
+                <a:shade val="78000"/>
+              </a:schemeClr>
+            </a:gs>
+          </a:gsLst>
+          <a:lin ang="5400000" scaled="0"/>
+        </a:gradFill>
+      </a:fillStyleLst>
+      <a:lnStyleLst>
+        <a:ln w="12700" cap="flat" cmpd="sng" algn="ctr">
+          <a:solidFill>
+            <a:schemeClr val="phClr"/>
+          </a:solidFill>
+          <a:prstDash val="solid"/>
+          <a:miter lim="800000"/>
+        </a:ln>
+        <a:ln w="19050" cap="flat" cmpd="sng" algn="ctr">
+          <a:solidFill>
+            <a:schemeClr val="phClr"/>
+          </a:solidFill>
+          <a:prstDash val="solid"/>
+          <a:miter lim="800000"/>
+        </a:ln>
+        <a:ln w="25400" cap="flat" cmpd="sng" algn="ctr">
+          <a:solidFill>
+            <a:schemeClr val="phClr"/>
+          </a:solidFill>
+          <a:prstDash val="solid"/>
+          <a:miter lim="800000"/>
+        </a:ln>
+      </a:lnStyleLst>
+      <a:effectStyleLst>
+        <a:effectStyle>
+          <a:effectLst/>
+        </a:effectStyle>
+        <a:effectStyle>
+          <a:effectLst/>
+        </a:effectStyle>
+        <a:effectStyle>
+          <a:effectLst>
+            <a:outerShdw blurRad="57150" dist="19050" dir="5400000" algn="ctr" rotWithShape="0">
+              <a:srgbClr val="000000">
+                <a:alpha val="63000"/>
+              </a:srgbClr>
+            </a:outerShdw>
+          </a:effectLst>
+        </a:effectStyle>
+      </a:effectStyleLst>
+      <a:bgFillStyleLst>
+        <a:solidFill>
+          <a:schemeClr val="phClr"/>
+        </a:solidFill>
+        <a:solidFill>
+          <a:schemeClr val="phClr">
+            <a:tint val="95000"/>
+            <a:satMod val="170000"/>
+          </a:schemeClr>
+        </a:solidFill>
+        <a:gradFill rotWithShape="1">
+          <a:gsLst>
+            <a:gs pos="0">
+              <a:schemeClr val="phClr">
+                <a:tint val="93000"/>
+                <a:satMod val="150000"/>
+                <a:shade val="98000"/>
+                <a:lumMod val="102000"/>
+              </a:schemeClr>
+            </a:gs>
+            <a:gs pos="50000">
+              <a:schemeClr val="phClr">
+                <a:tint val="98000"/>
+                <a:satMod val="130000"/>
+                <a:shade val="90000"/>
+                <a:lumMod val="103000"/>
+              </a:schemeClr>
+            </a:gs>
+            <a:gs pos="100000">
+              <a:schemeClr val="phClr">
+                <a:shade val="63000"/>
+                <a:satMod val="120000"/>
+              </a:schemeClr>
+            </a:gs>
+          </a:gsLst>
+          <a:lin ang="5400000" scaled="0"/>
+        </a:gradFill>
+      </a:bgFillStyleLst>
+    </a:fmtScheme>
+  </a:themeElements>
+  <a:objectDefaults>
+    <a:lnDef>
+      <a:spPr/>
+      <a:bodyPr/>
+      <a:lstStyle/>
+      <a:style>
+        <a:lnRef idx="2">
+          <a:schemeClr val="accent1"/>
+        </a:lnRef>
+        <a:fillRef idx="0">
+          <a:schemeClr val="accent1"/>
+        </a:fillRef>
+        <a:effectRef idx="1">
+          <a:schemeClr val="accent1"/>
+        </a:effectRef>
+        <a:fontRef idx="minor">
+          <a:schemeClr val="tx1"/>
+        </a:fontRef>
+      </a:style>
+    </a:lnDef>
+  </a:objectDefaults>
+  <a:extraClrSchemeLst/>
+  <a:extLst>
+    <a:ext uri="{05A4C25C-085E-4340-85A3-A5531E510DB2}">
+      <thm15:themeFamily xmlns:thm15="http://schemas.microsoft.com/office/thememl/2012/main" name="Office Theme" id="{2E142A2C-CD16-42D6-873A-C26D2A0506FA}" vid="{1BDDFF52-6CD6-40A5-AB3C-68EB2F1E4D0A}"/>
+    </a:ext>
+  </a:extLst>
+</a:theme>
 </file>